--- a/1_布线.pptx
+++ b/1_布线.pptx
@@ -6,17 +6,18 @@
   </p:sldMasterIdLst>
   <p:sldIdLst>
     <p:sldId id="259" r:id="rId2"/>
-    <p:sldId id="267" r:id="rId3"/>
-    <p:sldId id="269" r:id="rId4"/>
-    <p:sldId id="268" r:id="rId5"/>
-    <p:sldId id="264" r:id="rId6"/>
-    <p:sldId id="265" r:id="rId7"/>
-    <p:sldId id="262" r:id="rId8"/>
-    <p:sldId id="258" r:id="rId9"/>
-    <p:sldId id="263" r:id="rId10"/>
-    <p:sldId id="266" r:id="rId11"/>
-    <p:sldId id="260" r:id="rId12"/>
-    <p:sldId id="261" r:id="rId13"/>
+    <p:sldId id="270" r:id="rId3"/>
+    <p:sldId id="267" r:id="rId4"/>
+    <p:sldId id="269" r:id="rId5"/>
+    <p:sldId id="268" r:id="rId6"/>
+    <p:sldId id="264" r:id="rId7"/>
+    <p:sldId id="265" r:id="rId8"/>
+    <p:sldId id="262" r:id="rId9"/>
+    <p:sldId id="258" r:id="rId10"/>
+    <p:sldId id="263" r:id="rId11"/>
+    <p:sldId id="266" r:id="rId12"/>
+    <p:sldId id="260" r:id="rId13"/>
+    <p:sldId id="261" r:id="rId14"/>
   </p:sldIdLst>
   <p:sldSz cx="12192000" cy="6858000"/>
   <p:notesSz cx="6858000" cy="9144000"/>
@@ -3570,2150 +3571,6 @@
           <p:cNvPr id="2" name="标题 1">
             <a:extLst>
               <a:ext uri="{FF2B5EF4-FFF2-40B4-BE49-F238E27FC236}">
-                <a16:creationId xmlns:a16="http://schemas.microsoft.com/office/drawing/2014/main" id="{F1E7E7DE-A1C5-DE2C-8485-83CD0B7840D3}"/>
-              </a:ext>
-            </a:extLst>
-          </p:cNvPr>
-          <p:cNvSpPr>
-            <a:spLocks noGrp="1"/>
-          </p:cNvSpPr>
-          <p:nvPr>
-            <p:ph type="title"/>
-          </p:nvPr>
-        </p:nvSpPr>
-        <p:spPr/>
-        <p:txBody>
-          <a:bodyPr/>
-          <a:lstStyle/>
-          <a:p>
-            <a:r>
-              <a:rPr lang="zh-CN" altLang="en-US" dirty="0"/>
-              <a:t>定长</a:t>
-            </a:r>
-            <a:endParaRPr lang="zh-SG" altLang="en-US" dirty="0"/>
-          </a:p>
-        </p:txBody>
-      </p:sp>
-      <p:sp>
-        <p:nvSpPr>
-          <p:cNvPr id="3" name="内容占位符 2">
-            <a:extLst>
-              <a:ext uri="{FF2B5EF4-FFF2-40B4-BE49-F238E27FC236}">
-                <a16:creationId xmlns:a16="http://schemas.microsoft.com/office/drawing/2014/main" id="{AFD37560-1E4A-9D22-69CF-D52811E72FDE}"/>
-              </a:ext>
-            </a:extLst>
-          </p:cNvPr>
-          <p:cNvSpPr>
-            <a:spLocks noGrp="1"/>
-          </p:cNvSpPr>
-          <p:nvPr>
-            <p:ph sz="half" idx="1"/>
-          </p:nvPr>
-        </p:nvSpPr>
-        <p:spPr/>
-        <p:txBody>
-          <a:bodyPr/>
-          <a:lstStyle/>
-          <a:p>
-            <a:pPr marL="0" indent="0">
-              <a:buNone/>
-            </a:pPr>
-            <a:r>
-              <a:rPr lang="zh-CN" altLang="en-US" dirty="0"/>
-              <a:t>规划线路</a:t>
-            </a:r>
-            <a:endParaRPr lang="en-US" altLang="zh-CN" dirty="0"/>
-          </a:p>
-          <a:p>
-            <a:r>
-              <a:rPr lang="zh-CN" altLang="en-US" dirty="0"/>
-              <a:t>有方便固定的点位</a:t>
-            </a:r>
-            <a:endParaRPr lang="en-US" altLang="zh-CN" dirty="0"/>
-          </a:p>
-          <a:p>
-            <a:r>
-              <a:rPr lang="zh-CN" altLang="en-US" dirty="0"/>
-              <a:t>避免受拉</a:t>
-            </a:r>
-            <a:r>
-              <a:rPr lang="en-US" altLang="zh-CN" dirty="0"/>
-              <a:t>/</a:t>
-            </a:r>
-            <a:r>
-              <a:rPr lang="zh-CN" altLang="en-US" dirty="0"/>
-              <a:t>受压</a:t>
-            </a:r>
-            <a:r>
-              <a:rPr lang="en-US" altLang="zh-CN" dirty="0"/>
-              <a:t>/</a:t>
-            </a:r>
-            <a:r>
-              <a:rPr lang="zh-CN" altLang="en-US" dirty="0"/>
-              <a:t>受击</a:t>
-            </a:r>
-            <a:endParaRPr lang="en-US" altLang="zh-CN" dirty="0"/>
-          </a:p>
-          <a:p>
-            <a:r>
-              <a:rPr lang="zh-CN" altLang="en-US" dirty="0"/>
-              <a:t>可通过分电板引出分支</a:t>
-            </a:r>
-            <a:endParaRPr lang="en-US" altLang="zh-CN" dirty="0"/>
-          </a:p>
-          <a:p>
-            <a:r>
-              <a:rPr lang="zh-CN" altLang="en-US" dirty="0"/>
-              <a:t>信号线布设时应尽量符合标准，如</a:t>
-            </a:r>
-            <a:r>
-              <a:rPr lang="en-US" altLang="zh-CN" dirty="0"/>
-              <a:t>CAN</a:t>
-            </a:r>
-            <a:r>
-              <a:rPr lang="zh-CN" altLang="en-US" dirty="0"/>
-              <a:t>线应尽量缩短支路</a:t>
-            </a:r>
-            <a:endParaRPr lang="en-US" altLang="zh-CN" dirty="0"/>
-          </a:p>
-        </p:txBody>
-      </p:sp>
-      <p:sp>
-        <p:nvSpPr>
-          <p:cNvPr id="4" name="内容占位符 3">
-            <a:extLst>
-              <a:ext uri="{FF2B5EF4-FFF2-40B4-BE49-F238E27FC236}">
-                <a16:creationId xmlns:a16="http://schemas.microsoft.com/office/drawing/2014/main" id="{B576A1A1-D026-5BB2-3113-CAF4D0710DB9}"/>
-              </a:ext>
-            </a:extLst>
-          </p:cNvPr>
-          <p:cNvSpPr>
-            <a:spLocks noGrp="1"/>
-          </p:cNvSpPr>
-          <p:nvPr>
-            <p:ph sz="half" idx="2"/>
-          </p:nvPr>
-        </p:nvSpPr>
-        <p:spPr/>
-        <p:txBody>
-          <a:bodyPr/>
-          <a:lstStyle/>
-          <a:p>
-            <a:pPr marL="0" indent="0">
-              <a:buNone/>
-            </a:pPr>
-            <a:r>
-              <a:rPr lang="zh-CN" altLang="en-US" dirty="0"/>
-              <a:t>留余量</a:t>
-            </a:r>
-            <a:endParaRPr lang="en-US" altLang="zh-CN" dirty="0"/>
-          </a:p>
-          <a:p>
-            <a:r>
-              <a:rPr lang="zh-CN" altLang="en-US" dirty="0"/>
-              <a:t>旋转、平移到限位时不扯线</a:t>
-            </a:r>
-            <a:endParaRPr lang="en-US" altLang="zh-CN" dirty="0"/>
-          </a:p>
-          <a:p>
-            <a:r>
-              <a:rPr lang="zh-CN" altLang="en-US" dirty="0"/>
-              <a:t>检修时为了不增加焊点数量，会越剪越短</a:t>
-            </a:r>
-            <a:endParaRPr lang="zh-SG" altLang="en-US" dirty="0"/>
-          </a:p>
-        </p:txBody>
-      </p:sp>
-      <p:pic>
-        <p:nvPicPr>
-          <p:cNvPr id="5" name="图片 4">
-            <a:extLst>
-              <a:ext uri="{FF2B5EF4-FFF2-40B4-BE49-F238E27FC236}">
-                <a16:creationId xmlns:a16="http://schemas.microsoft.com/office/drawing/2014/main" id="{AA73D6EC-6AA7-41E5-ACA8-AA57BC87C3F1}"/>
-              </a:ext>
-            </a:extLst>
-          </p:cNvPr>
-          <p:cNvPicPr>
-            <a:picLocks noChangeAspect="1"/>
-          </p:cNvPicPr>
-          <p:nvPr/>
-        </p:nvPicPr>
-        <p:blipFill>
-          <a:blip r:embed="rId2"/>
-          <a:stretch>
-            <a:fillRect/>
-          </a:stretch>
-        </p:blipFill>
-        <p:spPr>
-          <a:xfrm>
-            <a:off x="838200" y="4885033"/>
-            <a:ext cx="6096000" cy="1291930"/>
-          </a:xfrm>
-          <a:prstGeom prst="rect">
-            <a:avLst/>
-          </a:prstGeom>
-        </p:spPr>
-      </p:pic>
-    </p:spTree>
-    <p:extLst>
-      <p:ext uri="{BB962C8B-B14F-4D97-AF65-F5344CB8AC3E}">
-        <p14:creationId xmlns:p14="http://schemas.microsoft.com/office/powerpoint/2010/main" val="3006708727"/>
-      </p:ext>
-    </p:extLst>
-  </p:cSld>
-  <p:clrMapOvr>
-    <a:masterClrMapping/>
-  </p:clrMapOvr>
-</p:sld>
-</file>
-
-<file path=ppt/slides/slide11.xml><?xml version="1.0" encoding="utf-8"?>
-<p:sld xmlns:a="http://schemas.openxmlformats.org/drawingml/2006/main" xmlns:r="http://schemas.openxmlformats.org/officeDocument/2006/relationships" xmlns:p="http://schemas.openxmlformats.org/presentationml/2006/main">
-  <p:cSld>
-    <p:spTree>
-      <p:nvGrpSpPr>
-        <p:cNvPr id="1" name=""/>
-        <p:cNvGrpSpPr/>
-        <p:nvPr/>
-      </p:nvGrpSpPr>
-      <p:grpSpPr>
-        <a:xfrm>
-          <a:off x="0" y="0"/>
-          <a:ext cx="0" cy="0"/>
-          <a:chOff x="0" y="0"/>
-          <a:chExt cx="0" cy="0"/>
-        </a:xfrm>
-      </p:grpSpPr>
-      <p:sp>
-        <p:nvSpPr>
-          <p:cNvPr id="2" name="标题 1">
-            <a:extLst>
-              <a:ext uri="{FF2B5EF4-FFF2-40B4-BE49-F238E27FC236}">
-                <a16:creationId xmlns:a16="http://schemas.microsoft.com/office/drawing/2014/main" id="{09C38C44-564C-99CB-22AF-13091DEAEA3A}"/>
-              </a:ext>
-            </a:extLst>
-          </p:cNvPr>
-          <p:cNvSpPr>
-            <a:spLocks noGrp="1"/>
-          </p:cNvSpPr>
-          <p:nvPr>
-            <p:ph type="title"/>
-          </p:nvPr>
-        </p:nvSpPr>
-        <p:spPr/>
-        <p:txBody>
-          <a:bodyPr/>
-          <a:lstStyle/>
-          <a:p>
-            <a:r>
-              <a:rPr lang="zh-CN" altLang="en-US" dirty="0"/>
-              <a:t>焊接要求与技巧</a:t>
-            </a:r>
-          </a:p>
-        </p:txBody>
-      </p:sp>
-      <p:sp>
-        <p:nvSpPr>
-          <p:cNvPr id="3" name="内容占位符 2">
-            <a:extLst>
-              <a:ext uri="{FF2B5EF4-FFF2-40B4-BE49-F238E27FC236}">
-                <a16:creationId xmlns:a16="http://schemas.microsoft.com/office/drawing/2014/main" id="{53B0FE35-D810-2542-3664-7B1FF5DC7514}"/>
-              </a:ext>
-            </a:extLst>
-          </p:cNvPr>
-          <p:cNvSpPr>
-            <a:spLocks noGrp="1"/>
-          </p:cNvSpPr>
-          <p:nvPr>
-            <p:ph sz="half" idx="1"/>
-          </p:nvPr>
-        </p:nvSpPr>
-        <p:spPr>
-          <a:xfrm>
-            <a:off x="838200" y="1549179"/>
-            <a:ext cx="5181600" cy="4351338"/>
-          </a:xfrm>
-        </p:spPr>
-        <p:txBody>
-          <a:bodyPr/>
-          <a:lstStyle/>
-          <a:p>
-            <a:r>
-              <a:rPr lang="zh-CN" altLang="en-US" dirty="0"/>
-              <a:t>焊点圆润饱满，完全浸润线芯</a:t>
-            </a:r>
-            <a:endParaRPr lang="en-US" altLang="zh-CN" dirty="0"/>
-          </a:p>
-          <a:p>
-            <a:r>
-              <a:rPr lang="zh-CN" altLang="en-US" dirty="0"/>
-              <a:t>尽量短小，浸润锡的线难弯折</a:t>
-            </a:r>
-            <a:endParaRPr lang="en-US" altLang="zh-CN" dirty="0"/>
-          </a:p>
-          <a:p>
-            <a:r>
-              <a:rPr lang="zh-CN" altLang="en-US" dirty="0"/>
-              <a:t>无尖刺，避免刺破热缩管</a:t>
-            </a:r>
-            <a:endParaRPr lang="en-US" altLang="zh-CN" dirty="0"/>
-          </a:p>
-        </p:txBody>
-      </p:sp>
-      <p:sp>
-        <p:nvSpPr>
-          <p:cNvPr id="4" name="内容占位符 3">
-            <a:extLst>
-              <a:ext uri="{FF2B5EF4-FFF2-40B4-BE49-F238E27FC236}">
-                <a16:creationId xmlns:a16="http://schemas.microsoft.com/office/drawing/2014/main" id="{5BC1A8FE-8B09-8ADD-E6FE-C6E13855D3E1}"/>
-              </a:ext>
-            </a:extLst>
-          </p:cNvPr>
-          <p:cNvSpPr>
-            <a:spLocks noGrp="1"/>
-          </p:cNvSpPr>
-          <p:nvPr>
-            <p:ph sz="half" idx="2"/>
-          </p:nvPr>
-        </p:nvSpPr>
-        <p:spPr>
-          <a:xfrm>
-            <a:off x="6172200" y="1690688"/>
-            <a:ext cx="5181600" cy="4351338"/>
-          </a:xfrm>
-        </p:spPr>
-        <p:txBody>
-          <a:bodyPr/>
-          <a:lstStyle/>
-          <a:p>
-            <a:r>
-              <a:rPr lang="zh-CN" altLang="en-US" dirty="0"/>
-              <a:t>信号线较细，可以将线芯扭成一个小结后上锡，也可以各自上锡后搭到一起；功率线较粗，可以各剪去一半线芯后搭在一起焊</a:t>
-            </a:r>
-            <a:endParaRPr lang="en-US" altLang="zh-CN" dirty="0"/>
-          </a:p>
-          <a:p>
-            <a:r>
-              <a:rPr lang="zh-CN" altLang="en-US" dirty="0"/>
-              <a:t>烙铁</a:t>
-            </a:r>
-            <a:r>
-              <a:rPr lang="en-US" altLang="zh-CN" dirty="0"/>
-              <a:t>320</a:t>
-            </a:r>
-            <a:r>
-              <a:rPr lang="zh-CN" altLang="en-US" dirty="0"/>
-              <a:t>度及以上，寻找合适角度增大接触面</a:t>
-            </a:r>
-            <a:endParaRPr lang="en-US" altLang="zh-CN" dirty="0"/>
-          </a:p>
-          <a:p>
-            <a:r>
-              <a:rPr lang="zh-CN" altLang="en-US" dirty="0"/>
-              <a:t>充分加热，若焊锡氧化可使用锡丝中的松香进行还原</a:t>
-            </a:r>
-            <a:endParaRPr lang="en-US" altLang="zh-CN" dirty="0"/>
-          </a:p>
-          <a:p>
-            <a:r>
-              <a:rPr lang="zh-CN" altLang="en-US" dirty="0"/>
-              <a:t>尽量固定线端，避免滑落</a:t>
-            </a:r>
-            <a:endParaRPr lang="en-US" altLang="zh-CN" dirty="0"/>
-          </a:p>
-        </p:txBody>
-      </p:sp>
-      <p:pic>
-        <p:nvPicPr>
-          <p:cNvPr id="6" name="图片 5">
-            <a:extLst>
-              <a:ext uri="{FF2B5EF4-FFF2-40B4-BE49-F238E27FC236}">
-                <a16:creationId xmlns:a16="http://schemas.microsoft.com/office/drawing/2014/main" id="{A7FCB60B-CED1-ADB6-029E-294C530F016D}"/>
-              </a:ext>
-            </a:extLst>
-          </p:cNvPr>
-          <p:cNvPicPr>
-            <a:picLocks noChangeAspect="1"/>
-          </p:cNvPicPr>
-          <p:nvPr/>
-        </p:nvPicPr>
-        <p:blipFill>
-          <a:blip r:embed="rId2">
-            <a:extLst>
-              <a:ext uri="{28A0092B-C50C-407E-A947-70E740481C1C}">
-                <a14:useLocalDpi xmlns:a14="http://schemas.microsoft.com/office/drawing/2010/main" val="0"/>
-              </a:ext>
-            </a:extLst>
-          </a:blip>
-          <a:stretch>
-            <a:fillRect/>
-          </a:stretch>
-        </p:blipFill>
-        <p:spPr>
-          <a:xfrm>
-            <a:off x="3292014" y="3016251"/>
-            <a:ext cx="2880185" cy="3841749"/>
-          </a:xfrm>
-          <a:prstGeom prst="rect">
-            <a:avLst/>
-          </a:prstGeom>
-        </p:spPr>
-      </p:pic>
-    </p:spTree>
-    <p:extLst>
-      <p:ext uri="{BB962C8B-B14F-4D97-AF65-F5344CB8AC3E}">
-        <p14:creationId xmlns:p14="http://schemas.microsoft.com/office/powerpoint/2010/main" val="2495693831"/>
-      </p:ext>
-    </p:extLst>
-  </p:cSld>
-  <p:clrMapOvr>
-    <a:masterClrMapping/>
-  </p:clrMapOvr>
-  <p:timing>
-    <p:tnLst>
-      <p:par>
-        <p:cTn id="1" dur="indefinite" restart="never" nodeType="tmRoot">
-          <p:childTnLst>
-            <p:seq concurrent="1" nextAc="seek">
-              <p:cTn id="2" dur="indefinite" nodeType="mainSeq">
-                <p:childTnLst>
-                  <p:par>
-                    <p:cTn id="3" fill="hold">
-                      <p:stCondLst>
-                        <p:cond delay="indefinite"/>
-                      </p:stCondLst>
-                      <p:childTnLst>
-                        <p:par>
-                          <p:cTn id="4" fill="hold">
-                            <p:stCondLst>
-                              <p:cond delay="0"/>
-                            </p:stCondLst>
-                            <p:childTnLst>
-                              <p:par>
-                                <p:cTn id="5" presetID="1" presetClass="entr" presetSubtype="0" fill="hold" nodeType="clickEffect">
-                                  <p:stCondLst>
-                                    <p:cond delay="0"/>
-                                  </p:stCondLst>
-                                  <p:childTnLst>
-                                    <p:set>
-                                      <p:cBhvr>
-                                        <p:cTn id="6" dur="1" fill="hold">
-                                          <p:stCondLst>
-                                            <p:cond delay="0"/>
-                                          </p:stCondLst>
-                                        </p:cTn>
-                                        <p:tgtEl>
-                                          <p:spTgt spid="6"/>
-                                        </p:tgtEl>
-                                        <p:attrNameLst>
-                                          <p:attrName>style.visibility</p:attrName>
-                                        </p:attrNameLst>
-                                      </p:cBhvr>
-                                      <p:to>
-                                        <p:strVal val="visible"/>
-                                      </p:to>
-                                    </p:set>
-                                  </p:childTnLst>
-                                </p:cTn>
-                              </p:par>
-                            </p:childTnLst>
-                          </p:cTn>
-                        </p:par>
-                      </p:childTnLst>
-                    </p:cTn>
-                  </p:par>
-                </p:childTnLst>
-              </p:cTn>
-              <p:prevCondLst>
-                <p:cond evt="onPrev" delay="0">
-                  <p:tgtEl>
-                    <p:sldTgt/>
-                  </p:tgtEl>
-                </p:cond>
-              </p:prevCondLst>
-              <p:nextCondLst>
-                <p:cond evt="onNext" delay="0">
-                  <p:tgtEl>
-                    <p:sldTgt/>
-                  </p:tgtEl>
-                </p:cond>
-              </p:nextCondLst>
-            </p:seq>
-          </p:childTnLst>
-        </p:cTn>
-      </p:par>
-    </p:tnLst>
-  </p:timing>
-</p:sld>
-</file>
-
-<file path=ppt/slides/slide12.xml><?xml version="1.0" encoding="utf-8"?>
-<p:sld xmlns:a="http://schemas.openxmlformats.org/drawingml/2006/main" xmlns:r="http://schemas.openxmlformats.org/officeDocument/2006/relationships" xmlns:p="http://schemas.openxmlformats.org/presentationml/2006/main">
-  <p:cSld>
-    <p:spTree>
-      <p:nvGrpSpPr>
-        <p:cNvPr id="1" name=""/>
-        <p:cNvGrpSpPr/>
-        <p:nvPr/>
-      </p:nvGrpSpPr>
-      <p:grpSpPr>
-        <a:xfrm>
-          <a:off x="0" y="0"/>
-          <a:ext cx="0" cy="0"/>
-          <a:chOff x="0" y="0"/>
-          <a:chExt cx="0" cy="0"/>
-        </a:xfrm>
-      </p:grpSpPr>
-      <p:sp>
-        <p:nvSpPr>
-          <p:cNvPr id="2" name="标题 1">
-            <a:extLst>
-              <a:ext uri="{FF2B5EF4-FFF2-40B4-BE49-F238E27FC236}">
-                <a16:creationId xmlns:a16="http://schemas.microsoft.com/office/drawing/2014/main" id="{D52A8CDA-50C5-66B2-64D0-738D7DFDD951}"/>
-              </a:ext>
-            </a:extLst>
-          </p:cNvPr>
-          <p:cNvSpPr>
-            <a:spLocks noGrp="1"/>
-          </p:cNvSpPr>
-          <p:nvPr>
-            <p:ph type="title"/>
-          </p:nvPr>
-        </p:nvSpPr>
-        <p:spPr/>
-        <p:txBody>
-          <a:bodyPr/>
-          <a:lstStyle/>
-          <a:p>
-            <a:r>
-              <a:rPr lang="zh-CN" altLang="en-US" dirty="0"/>
-              <a:t>绝缘、保护和固定</a:t>
-            </a:r>
-          </a:p>
-        </p:txBody>
-      </p:sp>
-      <p:sp>
-        <p:nvSpPr>
-          <p:cNvPr id="3" name="内容占位符 2">
-            <a:extLst>
-              <a:ext uri="{FF2B5EF4-FFF2-40B4-BE49-F238E27FC236}">
-                <a16:creationId xmlns:a16="http://schemas.microsoft.com/office/drawing/2014/main" id="{78C4DE1F-F4F2-53A9-AAAD-4E9BED0C7965}"/>
-              </a:ext>
-            </a:extLst>
-          </p:cNvPr>
-          <p:cNvSpPr>
-            <a:spLocks noGrp="1"/>
-          </p:cNvSpPr>
-          <p:nvPr>
-            <p:ph sz="half" idx="1"/>
-          </p:nvPr>
-        </p:nvSpPr>
-        <p:spPr/>
-        <p:txBody>
-          <a:bodyPr/>
-          <a:lstStyle/>
-          <a:p>
-            <a:pPr marL="0" indent="0">
-              <a:buNone/>
-            </a:pPr>
-            <a:r>
-              <a:rPr lang="zh-CN" altLang="en-US" dirty="0"/>
-              <a:t>绝缘：</a:t>
-            </a:r>
-            <a:endParaRPr lang="en-US" altLang="zh-CN" dirty="0"/>
-          </a:p>
-          <a:p>
-            <a:r>
-              <a:rPr lang="zh-CN" altLang="en-US" dirty="0"/>
-              <a:t>热缩管套住焊点</a:t>
-            </a:r>
-            <a:endParaRPr lang="en-US" altLang="zh-CN" dirty="0"/>
-          </a:p>
-          <a:p>
-            <a:r>
-              <a:rPr lang="zh-CN" altLang="en-US" dirty="0"/>
-              <a:t>三防漆覆盖焊盘</a:t>
-            </a:r>
-            <a:endParaRPr lang="en-US" altLang="zh-CN" dirty="0"/>
-          </a:p>
-          <a:p>
-            <a:r>
-              <a:rPr lang="zh-CN" altLang="en-US" dirty="0"/>
-              <a:t>醋酸布包裹</a:t>
-            </a:r>
-          </a:p>
-        </p:txBody>
-      </p:sp>
-      <p:sp>
-        <p:nvSpPr>
-          <p:cNvPr id="4" name="内容占位符 3">
-            <a:extLst>
-              <a:ext uri="{FF2B5EF4-FFF2-40B4-BE49-F238E27FC236}">
-                <a16:creationId xmlns:a16="http://schemas.microsoft.com/office/drawing/2014/main" id="{0DEDB503-B7DA-42A2-9DBE-0779BB9FF5B8}"/>
-              </a:ext>
-            </a:extLst>
-          </p:cNvPr>
-          <p:cNvSpPr>
-            <a:spLocks noGrp="1"/>
-          </p:cNvSpPr>
-          <p:nvPr>
-            <p:ph sz="half" idx="2"/>
-          </p:nvPr>
-        </p:nvSpPr>
-        <p:spPr>
-          <a:xfrm>
-            <a:off x="3786808" y="1825625"/>
-            <a:ext cx="5181600" cy="4351338"/>
-          </a:xfrm>
-        </p:spPr>
-        <p:txBody>
-          <a:bodyPr/>
-          <a:lstStyle/>
-          <a:p>
-            <a:pPr marL="0" indent="0">
-              <a:buNone/>
-            </a:pPr>
-            <a:r>
-              <a:rPr lang="zh-CN" altLang="en-US" dirty="0"/>
-              <a:t>保护：</a:t>
-            </a:r>
-            <a:endParaRPr lang="en-US" altLang="zh-CN" dirty="0"/>
-          </a:p>
-          <a:p>
-            <a:r>
-              <a:rPr lang="zh-CN" altLang="en-US" dirty="0"/>
-              <a:t>束线管</a:t>
-            </a:r>
-            <a:endParaRPr lang="en-US" altLang="zh-CN" dirty="0"/>
-          </a:p>
-          <a:p>
-            <a:r>
-              <a:rPr lang="zh-CN" altLang="en-US" dirty="0"/>
-              <a:t>蛇皮管</a:t>
-            </a:r>
-            <a:endParaRPr lang="en-US" altLang="zh-CN" dirty="0"/>
-          </a:p>
-          <a:p>
-            <a:r>
-              <a:rPr lang="zh-CN" altLang="en-US" dirty="0"/>
-              <a:t>拷打机械留出线槽</a:t>
-            </a:r>
-            <a:endParaRPr lang="en-US" altLang="zh-CN" dirty="0"/>
-          </a:p>
-        </p:txBody>
-      </p:sp>
-      <p:sp>
-        <p:nvSpPr>
-          <p:cNvPr id="5" name="内容占位符 3">
-            <a:extLst>
-              <a:ext uri="{FF2B5EF4-FFF2-40B4-BE49-F238E27FC236}">
-                <a16:creationId xmlns:a16="http://schemas.microsoft.com/office/drawing/2014/main" id="{F9552844-7714-2AAA-2EB9-E4D820BF3A71}"/>
-              </a:ext>
-            </a:extLst>
-          </p:cNvPr>
-          <p:cNvSpPr txBox="1">
-            <a:spLocks/>
-          </p:cNvSpPr>
-          <p:nvPr/>
-        </p:nvSpPr>
-        <p:spPr>
-          <a:xfrm>
-            <a:off x="7010400" y="1825625"/>
-            <a:ext cx="5181600" cy="4351338"/>
-          </a:xfrm>
-          <a:prstGeom prst="rect">
-            <a:avLst/>
-          </a:prstGeom>
-        </p:spPr>
-        <p:txBody>
-          <a:bodyPr vert="horz" lIns="91440" tIns="45720" rIns="91440" bIns="45720" rtlCol="0">
-            <a:normAutofit/>
-          </a:bodyPr>
-          <a:lstStyle>
-            <a:lvl1pPr marL="228600" indent="-228600" algn="l" defTabSz="914400" rtl="0" eaLnBrk="1" latinLnBrk="0" hangingPunct="1">
-              <a:lnSpc>
-                <a:spcPct val="90000"/>
-              </a:lnSpc>
-              <a:spcBef>
-                <a:spcPts val="1000"/>
-              </a:spcBef>
-              <a:buFont typeface="Arial" panose="020B0604020202020204" pitchFamily="34" charset="0"/>
-              <a:buChar char="•"/>
-              <a:defRPr sz="2800" kern="1200">
-                <a:solidFill>
-                  <a:schemeClr val="tx1"/>
-                </a:solidFill>
-                <a:latin typeface="+mn-lt"/>
-                <a:ea typeface="+mn-ea"/>
-                <a:cs typeface="+mn-cs"/>
-              </a:defRPr>
-            </a:lvl1pPr>
-            <a:lvl2pPr marL="685800" indent="-228600" algn="l" defTabSz="914400" rtl="0" eaLnBrk="1" latinLnBrk="0" hangingPunct="1">
-              <a:lnSpc>
-                <a:spcPct val="90000"/>
-              </a:lnSpc>
-              <a:spcBef>
-                <a:spcPts val="500"/>
-              </a:spcBef>
-              <a:buFont typeface="Arial" panose="020B0604020202020204" pitchFamily="34" charset="0"/>
-              <a:buChar char="•"/>
-              <a:defRPr sz="2400" kern="1200">
-                <a:solidFill>
-                  <a:schemeClr val="tx1"/>
-                </a:solidFill>
-                <a:latin typeface="+mn-lt"/>
-                <a:ea typeface="+mn-ea"/>
-                <a:cs typeface="+mn-cs"/>
-              </a:defRPr>
-            </a:lvl2pPr>
-            <a:lvl3pPr marL="1143000" indent="-228600" algn="l" defTabSz="914400" rtl="0" eaLnBrk="1" latinLnBrk="0" hangingPunct="1">
-              <a:lnSpc>
-                <a:spcPct val="90000"/>
-              </a:lnSpc>
-              <a:spcBef>
-                <a:spcPts val="500"/>
-              </a:spcBef>
-              <a:buFont typeface="Arial" panose="020B0604020202020204" pitchFamily="34" charset="0"/>
-              <a:buChar char="•"/>
-              <a:defRPr sz="2000" kern="1200">
-                <a:solidFill>
-                  <a:schemeClr val="tx1"/>
-                </a:solidFill>
-                <a:latin typeface="+mn-lt"/>
-                <a:ea typeface="+mn-ea"/>
-                <a:cs typeface="+mn-cs"/>
-              </a:defRPr>
-            </a:lvl3pPr>
-            <a:lvl4pPr marL="1600200" indent="-228600" algn="l" defTabSz="914400" rtl="0" eaLnBrk="1" latinLnBrk="0" hangingPunct="1">
-              <a:lnSpc>
-                <a:spcPct val="90000"/>
-              </a:lnSpc>
-              <a:spcBef>
-                <a:spcPts val="500"/>
-              </a:spcBef>
-              <a:buFont typeface="Arial" panose="020B0604020202020204" pitchFamily="34" charset="0"/>
-              <a:buChar char="•"/>
-              <a:defRPr sz="1800" kern="1200">
-                <a:solidFill>
-                  <a:schemeClr val="tx1"/>
-                </a:solidFill>
-                <a:latin typeface="+mn-lt"/>
-                <a:ea typeface="+mn-ea"/>
-                <a:cs typeface="+mn-cs"/>
-              </a:defRPr>
-            </a:lvl4pPr>
-            <a:lvl5pPr marL="2057400" indent="-228600" algn="l" defTabSz="914400" rtl="0" eaLnBrk="1" latinLnBrk="0" hangingPunct="1">
-              <a:lnSpc>
-                <a:spcPct val="90000"/>
-              </a:lnSpc>
-              <a:spcBef>
-                <a:spcPts val="500"/>
-              </a:spcBef>
-              <a:buFont typeface="Arial" panose="020B0604020202020204" pitchFamily="34" charset="0"/>
-              <a:buChar char="•"/>
-              <a:defRPr sz="1800" kern="1200">
-                <a:solidFill>
-                  <a:schemeClr val="tx1"/>
-                </a:solidFill>
-                <a:latin typeface="+mn-lt"/>
-                <a:ea typeface="+mn-ea"/>
-                <a:cs typeface="+mn-cs"/>
-              </a:defRPr>
-            </a:lvl5pPr>
-            <a:lvl6pPr marL="2514600" indent="-228600" algn="l" defTabSz="914400" rtl="0" eaLnBrk="1" latinLnBrk="0" hangingPunct="1">
-              <a:lnSpc>
-                <a:spcPct val="90000"/>
-              </a:lnSpc>
-              <a:spcBef>
-                <a:spcPts val="500"/>
-              </a:spcBef>
-              <a:buFont typeface="Arial" panose="020B0604020202020204" pitchFamily="34" charset="0"/>
-              <a:buChar char="•"/>
-              <a:defRPr sz="1800" kern="1200">
-                <a:solidFill>
-                  <a:schemeClr val="tx1"/>
-                </a:solidFill>
-                <a:latin typeface="+mn-lt"/>
-                <a:ea typeface="+mn-ea"/>
-                <a:cs typeface="+mn-cs"/>
-              </a:defRPr>
-            </a:lvl6pPr>
-            <a:lvl7pPr marL="2971800" indent="-228600" algn="l" defTabSz="914400" rtl="0" eaLnBrk="1" latinLnBrk="0" hangingPunct="1">
-              <a:lnSpc>
-                <a:spcPct val="90000"/>
-              </a:lnSpc>
-              <a:spcBef>
-                <a:spcPts val="500"/>
-              </a:spcBef>
-              <a:buFont typeface="Arial" panose="020B0604020202020204" pitchFamily="34" charset="0"/>
-              <a:buChar char="•"/>
-              <a:defRPr sz="1800" kern="1200">
-                <a:solidFill>
-                  <a:schemeClr val="tx1"/>
-                </a:solidFill>
-                <a:latin typeface="+mn-lt"/>
-                <a:ea typeface="+mn-ea"/>
-                <a:cs typeface="+mn-cs"/>
-              </a:defRPr>
-            </a:lvl7pPr>
-            <a:lvl8pPr marL="3429000" indent="-228600" algn="l" defTabSz="914400" rtl="0" eaLnBrk="1" latinLnBrk="0" hangingPunct="1">
-              <a:lnSpc>
-                <a:spcPct val="90000"/>
-              </a:lnSpc>
-              <a:spcBef>
-                <a:spcPts val="500"/>
-              </a:spcBef>
-              <a:buFont typeface="Arial" panose="020B0604020202020204" pitchFamily="34" charset="0"/>
-              <a:buChar char="•"/>
-              <a:defRPr sz="1800" kern="1200">
-                <a:solidFill>
-                  <a:schemeClr val="tx1"/>
-                </a:solidFill>
-                <a:latin typeface="+mn-lt"/>
-                <a:ea typeface="+mn-ea"/>
-                <a:cs typeface="+mn-cs"/>
-              </a:defRPr>
-            </a:lvl8pPr>
-            <a:lvl9pPr marL="3886200" indent="-228600" algn="l" defTabSz="914400" rtl="0" eaLnBrk="1" latinLnBrk="0" hangingPunct="1">
-              <a:lnSpc>
-                <a:spcPct val="90000"/>
-              </a:lnSpc>
-              <a:spcBef>
-                <a:spcPts val="500"/>
-              </a:spcBef>
-              <a:buFont typeface="Arial" panose="020B0604020202020204" pitchFamily="34" charset="0"/>
-              <a:buChar char="•"/>
-              <a:defRPr sz="1800" kern="1200">
-                <a:solidFill>
-                  <a:schemeClr val="tx1"/>
-                </a:solidFill>
-                <a:latin typeface="+mn-lt"/>
-                <a:ea typeface="+mn-ea"/>
-                <a:cs typeface="+mn-cs"/>
-              </a:defRPr>
-            </a:lvl9pPr>
-          </a:lstStyle>
-          <a:p>
-            <a:pPr marL="0" indent="0">
-              <a:buFont typeface="Arial" panose="020B0604020202020204" pitchFamily="34" charset="0"/>
-              <a:buNone/>
-            </a:pPr>
-            <a:r>
-              <a:rPr lang="zh-CN" altLang="en-US" dirty="0"/>
-              <a:t>固定：</a:t>
-            </a:r>
-            <a:endParaRPr lang="en-US" altLang="zh-CN" dirty="0"/>
-          </a:p>
-          <a:p>
-            <a:r>
-              <a:rPr lang="zh-CN" altLang="en-US" dirty="0"/>
-              <a:t>扎带捆扎（拷打机械留孔位）</a:t>
-            </a:r>
-            <a:endParaRPr lang="en-US" altLang="zh-CN" dirty="0"/>
-          </a:p>
-          <a:p>
-            <a:r>
-              <a:rPr lang="zh-CN" altLang="en-US" dirty="0"/>
-              <a:t>接口打热熔胶</a:t>
-            </a:r>
-            <a:endParaRPr lang="en-US" altLang="zh-CN" dirty="0"/>
-          </a:p>
-          <a:p>
-            <a:r>
-              <a:rPr lang="zh-CN" altLang="en-US" dirty="0"/>
-              <a:t>近端再次固定，避免线束由于惯性拉扯接口</a:t>
-            </a:r>
-            <a:endParaRPr lang="en-US" altLang="zh-CN" dirty="0"/>
-          </a:p>
-        </p:txBody>
-      </p:sp>
-      <p:pic>
-        <p:nvPicPr>
-          <p:cNvPr id="7" name="图片 6">
-            <a:extLst>
-              <a:ext uri="{FF2B5EF4-FFF2-40B4-BE49-F238E27FC236}">
-                <a16:creationId xmlns:a16="http://schemas.microsoft.com/office/drawing/2014/main" id="{B0A8D7EE-ACE7-F8AF-3831-FFF98B414070}"/>
-              </a:ext>
-            </a:extLst>
-          </p:cNvPr>
-          <p:cNvPicPr>
-            <a:picLocks noChangeAspect="1"/>
-          </p:cNvPicPr>
-          <p:nvPr/>
-        </p:nvPicPr>
-        <p:blipFill>
-          <a:blip r:embed="rId2">
-            <a:extLst>
-              <a:ext uri="{28A0092B-C50C-407E-A947-70E740481C1C}">
-                <a14:useLocalDpi xmlns:a14="http://schemas.microsoft.com/office/drawing/2010/main" val="0"/>
-              </a:ext>
-            </a:extLst>
-          </a:blip>
-          <a:stretch>
-            <a:fillRect/>
-          </a:stretch>
-        </p:blipFill>
-        <p:spPr>
-          <a:xfrm>
-            <a:off x="2933700" y="4346544"/>
-            <a:ext cx="6172200" cy="1231296"/>
-          </a:xfrm>
-          <a:prstGeom prst="rect">
-            <a:avLst/>
-          </a:prstGeom>
-        </p:spPr>
-      </p:pic>
-    </p:spTree>
-    <p:extLst>
-      <p:ext uri="{BB962C8B-B14F-4D97-AF65-F5344CB8AC3E}">
-        <p14:creationId xmlns:p14="http://schemas.microsoft.com/office/powerpoint/2010/main" val="3564265212"/>
-      </p:ext>
-    </p:extLst>
-  </p:cSld>
-  <p:clrMapOvr>
-    <a:masterClrMapping/>
-  </p:clrMapOvr>
-  <p:timing>
-    <p:tnLst>
-      <p:par>
-        <p:cTn id="1" dur="indefinite" restart="never" nodeType="tmRoot">
-          <p:childTnLst>
-            <p:seq concurrent="1" nextAc="seek">
-              <p:cTn id="2" dur="indefinite" nodeType="mainSeq">
-                <p:childTnLst>
-                  <p:par>
-                    <p:cTn id="3" fill="hold">
-                      <p:stCondLst>
-                        <p:cond delay="indefinite"/>
-                      </p:stCondLst>
-                      <p:childTnLst>
-                        <p:par>
-                          <p:cTn id="4" fill="hold">
-                            <p:stCondLst>
-                              <p:cond delay="0"/>
-                            </p:stCondLst>
-                            <p:childTnLst>
-                              <p:par>
-                                <p:cTn id="5" presetID="1" presetClass="entr" presetSubtype="0" fill="hold" nodeType="clickEffect">
-                                  <p:stCondLst>
-                                    <p:cond delay="0"/>
-                                  </p:stCondLst>
-                                  <p:childTnLst>
-                                    <p:set>
-                                      <p:cBhvr>
-                                        <p:cTn id="6" dur="1" fill="hold">
-                                          <p:stCondLst>
-                                            <p:cond delay="0"/>
-                                          </p:stCondLst>
-                                        </p:cTn>
-                                        <p:tgtEl>
-                                          <p:spTgt spid="7"/>
-                                        </p:tgtEl>
-                                        <p:attrNameLst>
-                                          <p:attrName>style.visibility</p:attrName>
-                                        </p:attrNameLst>
-                                      </p:cBhvr>
-                                      <p:to>
-                                        <p:strVal val="visible"/>
-                                      </p:to>
-                                    </p:set>
-                                  </p:childTnLst>
-                                </p:cTn>
-                              </p:par>
-                            </p:childTnLst>
-                          </p:cTn>
-                        </p:par>
-                      </p:childTnLst>
-                    </p:cTn>
-                  </p:par>
-                </p:childTnLst>
-              </p:cTn>
-              <p:prevCondLst>
-                <p:cond evt="onPrev" delay="0">
-                  <p:tgtEl>
-                    <p:sldTgt/>
-                  </p:tgtEl>
-                </p:cond>
-              </p:prevCondLst>
-              <p:nextCondLst>
-                <p:cond evt="onNext" delay="0">
-                  <p:tgtEl>
-                    <p:sldTgt/>
-                  </p:tgtEl>
-                </p:cond>
-              </p:nextCondLst>
-            </p:seq>
-          </p:childTnLst>
-        </p:cTn>
-      </p:par>
-    </p:tnLst>
-  </p:timing>
-</p:sld>
-</file>
-
-<file path=ppt/slides/slide2.xml><?xml version="1.0" encoding="utf-8"?>
-<p:sld xmlns:a="http://schemas.openxmlformats.org/drawingml/2006/main" xmlns:r="http://schemas.openxmlformats.org/officeDocument/2006/relationships" xmlns:p="http://schemas.openxmlformats.org/presentationml/2006/main">
-  <p:cSld>
-    <p:spTree>
-      <p:nvGrpSpPr>
-        <p:cNvPr id="1" name=""/>
-        <p:cNvGrpSpPr/>
-        <p:nvPr/>
-      </p:nvGrpSpPr>
-      <p:grpSpPr>
-        <a:xfrm>
-          <a:off x="0" y="0"/>
-          <a:ext cx="0" cy="0"/>
-          <a:chOff x="0" y="0"/>
-          <a:chExt cx="0" cy="0"/>
-        </a:xfrm>
-      </p:grpSpPr>
-      <p:sp>
-        <p:nvSpPr>
-          <p:cNvPr id="2" name="标题 1">
-            <a:extLst>
-              <a:ext uri="{FF2B5EF4-FFF2-40B4-BE49-F238E27FC236}">
-                <a16:creationId xmlns:a16="http://schemas.microsoft.com/office/drawing/2014/main" id="{DA95E2C5-DF32-13E8-9FF3-91C9F33B87B1}"/>
-              </a:ext>
-            </a:extLst>
-          </p:cNvPr>
-          <p:cNvSpPr>
-            <a:spLocks noGrp="1"/>
-          </p:cNvSpPr>
-          <p:nvPr>
-            <p:ph type="title"/>
-          </p:nvPr>
-        </p:nvSpPr>
-        <p:spPr/>
-        <p:txBody>
-          <a:bodyPr/>
-          <a:lstStyle/>
-          <a:p>
-            <a:r>
-              <a:rPr lang="zh-CN" altLang="en-US" dirty="0"/>
-              <a:t>常用电机</a:t>
-            </a:r>
-            <a:endParaRPr lang="zh-SG" altLang="en-US" dirty="0"/>
-          </a:p>
-        </p:txBody>
-      </p:sp>
-      <p:sp>
-        <p:nvSpPr>
-          <p:cNvPr id="3" name="内容占位符 2">
-            <a:extLst>
-              <a:ext uri="{FF2B5EF4-FFF2-40B4-BE49-F238E27FC236}">
-                <a16:creationId xmlns:a16="http://schemas.microsoft.com/office/drawing/2014/main" id="{75BDF090-144B-B729-3979-91C4E69D3F57}"/>
-              </a:ext>
-            </a:extLst>
-          </p:cNvPr>
-          <p:cNvSpPr>
-            <a:spLocks noGrp="1"/>
-          </p:cNvSpPr>
-          <p:nvPr>
-            <p:ph sz="half" idx="1"/>
-          </p:nvPr>
-        </p:nvSpPr>
-        <p:spPr>
-          <a:xfrm>
-            <a:off x="838200" y="1825625"/>
-            <a:ext cx="5181600" cy="4351338"/>
-          </a:xfrm>
-        </p:spPr>
-        <p:txBody>
-          <a:bodyPr>
-            <a:normAutofit/>
-          </a:bodyPr>
-          <a:lstStyle/>
-          <a:p>
-            <a:pPr marL="0" indent="0">
-              <a:buNone/>
-            </a:pPr>
-            <a:r>
-              <a:rPr lang="zh-CN" altLang="en-US" dirty="0"/>
-              <a:t>大疆电机：</a:t>
-            </a:r>
-            <a:endParaRPr lang="en-US" altLang="zh-CN" dirty="0"/>
-          </a:p>
-          <a:p>
-            <a:r>
-              <a:rPr lang="en-US" altLang="zh-CN" dirty="0"/>
-              <a:t>C620+3508</a:t>
-            </a:r>
-          </a:p>
-          <a:p>
-            <a:r>
-              <a:rPr lang="en-US" altLang="zh-CN" dirty="0"/>
-              <a:t>C610+2006</a:t>
-            </a:r>
-          </a:p>
-          <a:p>
-            <a:r>
-              <a:rPr lang="en-US" altLang="zh-SG" dirty="0"/>
-              <a:t>6020</a:t>
-            </a:r>
-          </a:p>
-          <a:p>
-            <a:pPr marL="0" indent="0">
-              <a:buNone/>
-            </a:pPr>
-            <a:r>
-              <a:rPr lang="zh-CN" altLang="en-US" dirty="0"/>
-              <a:t>使用</a:t>
-            </a:r>
-            <a:r>
-              <a:rPr lang="en-US" altLang="zh-CN" dirty="0"/>
-              <a:t>XT30+GH1.25</a:t>
-            </a:r>
-            <a:endParaRPr lang="zh-SG" altLang="en-US" dirty="0"/>
-          </a:p>
-        </p:txBody>
-      </p:sp>
-      <p:sp>
-        <p:nvSpPr>
-          <p:cNvPr id="4" name="内容占位符 3">
-            <a:extLst>
-              <a:ext uri="{FF2B5EF4-FFF2-40B4-BE49-F238E27FC236}">
-                <a16:creationId xmlns:a16="http://schemas.microsoft.com/office/drawing/2014/main" id="{F4D59F0C-FB9A-F4AD-8C84-C37956CF8E3F}"/>
-              </a:ext>
-            </a:extLst>
-          </p:cNvPr>
-          <p:cNvSpPr>
-            <a:spLocks noGrp="1"/>
-          </p:cNvSpPr>
-          <p:nvPr>
-            <p:ph sz="half" idx="2"/>
-          </p:nvPr>
-        </p:nvSpPr>
-        <p:spPr>
-          <a:xfrm>
-            <a:off x="6172200" y="1825625"/>
-            <a:ext cx="5181600" cy="4351338"/>
-          </a:xfrm>
-        </p:spPr>
-        <p:txBody>
-          <a:bodyPr>
-            <a:normAutofit/>
-          </a:bodyPr>
-          <a:lstStyle/>
-          <a:p>
-            <a:pPr marL="0" indent="0">
-              <a:buNone/>
-            </a:pPr>
-            <a:r>
-              <a:rPr lang="zh-CN" altLang="en-US" dirty="0"/>
-              <a:t>达妙电机：</a:t>
-            </a:r>
-            <a:endParaRPr lang="en-US" altLang="zh-CN" dirty="0"/>
-          </a:p>
-          <a:p>
-            <a:r>
-              <a:rPr lang="en-US" altLang="zh-SG" dirty="0"/>
-              <a:t>4310</a:t>
-            </a:r>
-          </a:p>
-          <a:p>
-            <a:r>
-              <a:rPr lang="en-US" altLang="zh-SG" dirty="0"/>
-              <a:t>8009</a:t>
-            </a:r>
-          </a:p>
-          <a:p>
-            <a:pPr marL="0" indent="0">
-              <a:buNone/>
-            </a:pPr>
-            <a:r>
-              <a:rPr lang="zh-CN" altLang="en-US" dirty="0"/>
-              <a:t>使用</a:t>
-            </a:r>
-            <a:r>
-              <a:rPr lang="en-US" altLang="zh-CN" dirty="0"/>
-              <a:t>XT30 2+2</a:t>
-            </a:r>
-          </a:p>
-          <a:p>
-            <a:pPr marL="0" indent="0">
-              <a:buNone/>
-            </a:pPr>
-            <a:endParaRPr lang="en-US" altLang="zh-SG" dirty="0"/>
-          </a:p>
-          <a:p>
-            <a:r>
-              <a:rPr lang="en-US" altLang="zh-SG" dirty="0"/>
-              <a:t>3507</a:t>
-            </a:r>
-            <a:endParaRPr lang="en-US" altLang="zh-CN" dirty="0"/>
-          </a:p>
-          <a:p>
-            <a:pPr marL="0" indent="0">
-              <a:buNone/>
-            </a:pPr>
-            <a:r>
-              <a:rPr lang="zh-CN" altLang="en-US" dirty="0"/>
-              <a:t>使用</a:t>
-            </a:r>
-            <a:r>
-              <a:rPr lang="en-US" altLang="zh-CN"/>
-              <a:t>SH1.0</a:t>
-            </a:r>
-            <a:endParaRPr lang="en-US" altLang="zh-SG" dirty="0"/>
-          </a:p>
-        </p:txBody>
-      </p:sp>
-    </p:spTree>
-    <p:extLst>
-      <p:ext uri="{BB962C8B-B14F-4D97-AF65-F5344CB8AC3E}">
-        <p14:creationId xmlns:p14="http://schemas.microsoft.com/office/powerpoint/2010/main" val="3967403093"/>
-      </p:ext>
-    </p:extLst>
-  </p:cSld>
-  <p:clrMapOvr>
-    <a:masterClrMapping/>
-  </p:clrMapOvr>
-</p:sld>
-</file>
-
-<file path=ppt/slides/slide3.xml><?xml version="1.0" encoding="utf-8"?>
-<p:sld xmlns:a="http://schemas.openxmlformats.org/drawingml/2006/main" xmlns:r="http://schemas.openxmlformats.org/officeDocument/2006/relationships" xmlns:p="http://schemas.openxmlformats.org/presentationml/2006/main">
-  <p:cSld>
-    <p:spTree>
-      <p:nvGrpSpPr>
-        <p:cNvPr id="1" name=""/>
-        <p:cNvGrpSpPr/>
-        <p:nvPr/>
-      </p:nvGrpSpPr>
-      <p:grpSpPr>
-        <a:xfrm>
-          <a:off x="0" y="0"/>
-          <a:ext cx="0" cy="0"/>
-          <a:chOff x="0" y="0"/>
-          <a:chExt cx="0" cy="0"/>
-        </a:xfrm>
-      </p:grpSpPr>
-      <p:pic>
-        <p:nvPicPr>
-          <p:cNvPr id="10" name="图片 9">
-            <a:extLst>
-              <a:ext uri="{FF2B5EF4-FFF2-40B4-BE49-F238E27FC236}">
-                <a16:creationId xmlns:a16="http://schemas.microsoft.com/office/drawing/2014/main" id="{6005CEEF-BAF0-44FB-32C7-D496BEF76100}"/>
-              </a:ext>
-            </a:extLst>
-          </p:cNvPr>
-          <p:cNvPicPr>
-            <a:picLocks noChangeAspect="1"/>
-          </p:cNvPicPr>
-          <p:nvPr/>
-        </p:nvPicPr>
-        <p:blipFill>
-          <a:blip r:embed="rId2"/>
-          <a:stretch>
-            <a:fillRect/>
-          </a:stretch>
-        </p:blipFill>
-        <p:spPr>
-          <a:xfrm>
-            <a:off x="1037519" y="509180"/>
-            <a:ext cx="10116962" cy="5839640"/>
-          </a:xfrm>
-          <a:prstGeom prst="rect">
-            <a:avLst/>
-          </a:prstGeom>
-        </p:spPr>
-      </p:pic>
-    </p:spTree>
-    <p:extLst>
-      <p:ext uri="{BB962C8B-B14F-4D97-AF65-F5344CB8AC3E}">
-        <p14:creationId xmlns:p14="http://schemas.microsoft.com/office/powerpoint/2010/main" val="836833322"/>
-      </p:ext>
-    </p:extLst>
-  </p:cSld>
-  <p:clrMapOvr>
-    <a:masterClrMapping/>
-  </p:clrMapOvr>
-</p:sld>
-</file>
-
-<file path=ppt/slides/slide4.xml><?xml version="1.0" encoding="utf-8"?>
-<p:sld xmlns:a="http://schemas.openxmlformats.org/drawingml/2006/main" xmlns:r="http://schemas.openxmlformats.org/officeDocument/2006/relationships" xmlns:p="http://schemas.openxmlformats.org/presentationml/2006/main">
-  <p:cSld>
-    <p:spTree>
-      <p:nvGrpSpPr>
-        <p:cNvPr id="1" name=""/>
-        <p:cNvGrpSpPr/>
-        <p:nvPr/>
-      </p:nvGrpSpPr>
-      <p:grpSpPr>
-        <a:xfrm>
-          <a:off x="0" y="0"/>
-          <a:ext cx="0" cy="0"/>
-          <a:chOff x="0" y="0"/>
-          <a:chExt cx="0" cy="0"/>
-        </a:xfrm>
-      </p:grpSpPr>
-      <p:pic>
-        <p:nvPicPr>
-          <p:cNvPr id="6" name="图片 5">
-            <a:extLst>
-              <a:ext uri="{FF2B5EF4-FFF2-40B4-BE49-F238E27FC236}">
-                <a16:creationId xmlns:a16="http://schemas.microsoft.com/office/drawing/2014/main" id="{32F645F2-BD95-1A3A-7E3F-ED63F4AFEEAE}"/>
-              </a:ext>
-            </a:extLst>
-          </p:cNvPr>
-          <p:cNvPicPr>
-            <a:picLocks noChangeAspect="1"/>
-          </p:cNvPicPr>
-          <p:nvPr/>
-        </p:nvPicPr>
-        <p:blipFill>
-          <a:blip r:embed="rId2"/>
-          <a:stretch>
-            <a:fillRect/>
-          </a:stretch>
-        </p:blipFill>
-        <p:spPr>
-          <a:xfrm>
-            <a:off x="2032371" y="0"/>
-            <a:ext cx="7974857" cy="6858000"/>
-          </a:xfrm>
-          <a:prstGeom prst="rect">
-            <a:avLst/>
-          </a:prstGeom>
-        </p:spPr>
-      </p:pic>
-    </p:spTree>
-    <p:extLst>
-      <p:ext uri="{BB962C8B-B14F-4D97-AF65-F5344CB8AC3E}">
-        <p14:creationId xmlns:p14="http://schemas.microsoft.com/office/powerpoint/2010/main" val="3223343368"/>
-      </p:ext>
-    </p:extLst>
-  </p:cSld>
-  <p:clrMapOvr>
-    <a:masterClrMapping/>
-  </p:clrMapOvr>
-</p:sld>
-</file>
-
-<file path=ppt/slides/slide5.xml><?xml version="1.0" encoding="utf-8"?>
-<p:sld xmlns:a="http://schemas.openxmlformats.org/drawingml/2006/main" xmlns:r="http://schemas.openxmlformats.org/officeDocument/2006/relationships" xmlns:p="http://schemas.openxmlformats.org/presentationml/2006/main">
-  <p:cSld>
-    <p:spTree>
-      <p:nvGrpSpPr>
-        <p:cNvPr id="1" name=""/>
-        <p:cNvGrpSpPr/>
-        <p:nvPr/>
-      </p:nvGrpSpPr>
-      <p:grpSpPr>
-        <a:xfrm>
-          <a:off x="0" y="0"/>
-          <a:ext cx="0" cy="0"/>
-          <a:chOff x="0" y="0"/>
-          <a:chExt cx="0" cy="0"/>
-        </a:xfrm>
-      </p:grpSpPr>
-      <p:sp>
-        <p:nvSpPr>
-          <p:cNvPr id="2" name="标题 1">
-            <a:extLst>
-              <a:ext uri="{FF2B5EF4-FFF2-40B4-BE49-F238E27FC236}">
-                <a16:creationId xmlns:a16="http://schemas.microsoft.com/office/drawing/2014/main" id="{D618B685-027A-8D12-C46C-4A16728ABA6B}"/>
-              </a:ext>
-            </a:extLst>
-          </p:cNvPr>
-          <p:cNvSpPr>
-            <a:spLocks noGrp="1"/>
-          </p:cNvSpPr>
-          <p:nvPr>
-            <p:ph type="title"/>
-          </p:nvPr>
-        </p:nvSpPr>
-        <p:spPr/>
-        <p:txBody>
-          <a:bodyPr/>
-          <a:lstStyle/>
-          <a:p>
-            <a:r>
-              <a:rPr lang="zh-CN" altLang="en-US" dirty="0"/>
-              <a:t>裁判系统接线</a:t>
-            </a:r>
-          </a:p>
-        </p:txBody>
-      </p:sp>
-      <p:sp>
-        <p:nvSpPr>
-          <p:cNvPr id="3" name="内容占位符 2">
-            <a:extLst>
-              <a:ext uri="{FF2B5EF4-FFF2-40B4-BE49-F238E27FC236}">
-                <a16:creationId xmlns:a16="http://schemas.microsoft.com/office/drawing/2014/main" id="{7CBCB741-D387-C5A7-8BAC-9ED5D5249279}"/>
-              </a:ext>
-            </a:extLst>
-          </p:cNvPr>
-          <p:cNvSpPr>
-            <a:spLocks noGrp="1"/>
-          </p:cNvSpPr>
-          <p:nvPr>
-            <p:ph sz="half" idx="1"/>
-          </p:nvPr>
-        </p:nvSpPr>
-        <p:spPr>
-          <a:xfrm>
-            <a:off x="838201" y="1375249"/>
-            <a:ext cx="5181600" cy="4351338"/>
-          </a:xfrm>
-        </p:spPr>
-        <p:txBody>
-          <a:bodyPr/>
-          <a:lstStyle/>
-          <a:p>
-            <a:r>
-              <a:rPr lang="zh-CN" altLang="en-US" dirty="0"/>
-              <a:t>看规则</a:t>
-            </a:r>
-            <a:endParaRPr lang="en-US" altLang="zh-CN" dirty="0"/>
-          </a:p>
-          <a:p>
-            <a:r>
-              <a:rPr lang="zh-CN" altLang="en-US" dirty="0"/>
-              <a:t>看规则</a:t>
-            </a:r>
-            <a:endParaRPr lang="en-US" altLang="zh-CN" dirty="0"/>
-          </a:p>
-          <a:p>
-            <a:r>
-              <a:rPr lang="zh-CN" altLang="en-US" dirty="0"/>
-              <a:t>看规则</a:t>
-            </a:r>
-            <a:endParaRPr lang="en-US" altLang="zh-CN" dirty="0"/>
-          </a:p>
-        </p:txBody>
-      </p:sp>
-      <p:sp>
-        <p:nvSpPr>
-          <p:cNvPr id="4" name="内容占位符 3">
-            <a:extLst>
-              <a:ext uri="{FF2B5EF4-FFF2-40B4-BE49-F238E27FC236}">
-                <a16:creationId xmlns:a16="http://schemas.microsoft.com/office/drawing/2014/main" id="{25605BE8-7CED-A702-22EB-A7D8C611C404}"/>
-              </a:ext>
-            </a:extLst>
-          </p:cNvPr>
-          <p:cNvSpPr>
-            <a:spLocks noGrp="1"/>
-          </p:cNvSpPr>
-          <p:nvPr>
-            <p:ph sz="half" idx="2"/>
-          </p:nvPr>
-        </p:nvSpPr>
-        <p:spPr>
-          <a:xfrm>
-            <a:off x="6096000" y="1375249"/>
-            <a:ext cx="5181600" cy="4351338"/>
-          </a:xfrm>
-        </p:spPr>
-        <p:txBody>
-          <a:bodyPr/>
-          <a:lstStyle/>
-          <a:p>
-            <a:r>
-              <a:rPr lang="zh-CN" altLang="en-US" dirty="0"/>
-              <a:t>看轻流</a:t>
-            </a:r>
-            <a:endParaRPr lang="en-US" altLang="zh-CN" dirty="0"/>
-          </a:p>
-          <a:p>
-            <a:r>
-              <a:rPr lang="zh-CN" altLang="en-US" dirty="0"/>
-              <a:t>看轻流</a:t>
-            </a:r>
-            <a:endParaRPr lang="en-US" altLang="zh-CN" dirty="0"/>
-          </a:p>
-          <a:p>
-            <a:r>
-              <a:rPr lang="zh-CN" altLang="en-US" dirty="0"/>
-              <a:t>看轻流</a:t>
-            </a:r>
-          </a:p>
-        </p:txBody>
-      </p:sp>
-      <p:pic>
-        <p:nvPicPr>
-          <p:cNvPr id="10" name="图片 9">
-            <a:extLst>
-              <a:ext uri="{FF2B5EF4-FFF2-40B4-BE49-F238E27FC236}">
-                <a16:creationId xmlns:a16="http://schemas.microsoft.com/office/drawing/2014/main" id="{CB03F7C1-A58A-A927-58F6-010EBF09BF55}"/>
-              </a:ext>
-            </a:extLst>
-          </p:cNvPr>
-          <p:cNvPicPr>
-            <a:picLocks noChangeAspect="1"/>
-          </p:cNvPicPr>
-          <p:nvPr/>
-        </p:nvPicPr>
-        <p:blipFill>
-          <a:blip r:embed="rId2"/>
-          <a:stretch>
-            <a:fillRect/>
-          </a:stretch>
-        </p:blipFill>
-        <p:spPr>
-          <a:xfrm>
-            <a:off x="0" y="3126270"/>
-            <a:ext cx="6583680" cy="3731730"/>
-          </a:xfrm>
-          <a:prstGeom prst="rect">
-            <a:avLst/>
-          </a:prstGeom>
-        </p:spPr>
-      </p:pic>
-      <p:pic>
-        <p:nvPicPr>
-          <p:cNvPr id="12" name="图片 11">
-            <a:extLst>
-              <a:ext uri="{FF2B5EF4-FFF2-40B4-BE49-F238E27FC236}">
-                <a16:creationId xmlns:a16="http://schemas.microsoft.com/office/drawing/2014/main" id="{53E6C745-3C9D-C18F-DB77-3BA9D30867B4}"/>
-              </a:ext>
-            </a:extLst>
-          </p:cNvPr>
-          <p:cNvPicPr>
-            <a:picLocks noChangeAspect="1"/>
-          </p:cNvPicPr>
-          <p:nvPr/>
-        </p:nvPicPr>
-        <p:blipFill>
-          <a:blip r:embed="rId3"/>
-          <a:stretch>
-            <a:fillRect/>
-          </a:stretch>
-        </p:blipFill>
-        <p:spPr>
-          <a:xfrm>
-            <a:off x="6581584" y="3776870"/>
-            <a:ext cx="5610416" cy="3081130"/>
-          </a:xfrm>
-          <a:prstGeom prst="rect">
-            <a:avLst/>
-          </a:prstGeom>
-        </p:spPr>
-      </p:pic>
-    </p:spTree>
-    <p:extLst>
-      <p:ext uri="{BB962C8B-B14F-4D97-AF65-F5344CB8AC3E}">
-        <p14:creationId xmlns:p14="http://schemas.microsoft.com/office/powerpoint/2010/main" val="353100262"/>
-      </p:ext>
-    </p:extLst>
-  </p:cSld>
-  <p:clrMapOvr>
-    <a:masterClrMapping/>
-  </p:clrMapOvr>
-</p:sld>
-</file>
-
-<file path=ppt/slides/slide6.xml><?xml version="1.0" encoding="utf-8"?>
-<p:sld xmlns:a="http://schemas.openxmlformats.org/drawingml/2006/main" xmlns:r="http://schemas.openxmlformats.org/officeDocument/2006/relationships" xmlns:p="http://schemas.openxmlformats.org/presentationml/2006/main">
-  <p:cSld>
-    <p:spTree>
-      <p:nvGrpSpPr>
-        <p:cNvPr id="1" name=""/>
-        <p:cNvGrpSpPr/>
-        <p:nvPr/>
-      </p:nvGrpSpPr>
-      <p:grpSpPr>
-        <a:xfrm>
-          <a:off x="0" y="0"/>
-          <a:ext cx="0" cy="0"/>
-          <a:chOff x="0" y="0"/>
-          <a:chExt cx="0" cy="0"/>
-        </a:xfrm>
-      </p:grpSpPr>
-      <p:sp>
-        <p:nvSpPr>
-          <p:cNvPr id="2" name="标题 1">
-            <a:extLst>
-              <a:ext uri="{FF2B5EF4-FFF2-40B4-BE49-F238E27FC236}">
-                <a16:creationId xmlns:a16="http://schemas.microsoft.com/office/drawing/2014/main" id="{E70F089B-E194-071F-8EA8-9FF3BB1F5B13}"/>
-              </a:ext>
-            </a:extLst>
-          </p:cNvPr>
-          <p:cNvSpPr>
-            <a:spLocks noGrp="1"/>
-          </p:cNvSpPr>
-          <p:nvPr>
-            <p:ph type="title"/>
-          </p:nvPr>
-        </p:nvSpPr>
-        <p:spPr/>
-        <p:txBody>
-          <a:bodyPr/>
-          <a:lstStyle/>
-          <a:p>
-            <a:r>
-              <a:rPr lang="zh-CN" altLang="en-US" dirty="0"/>
-              <a:t>裁判系统接线</a:t>
-            </a:r>
-          </a:p>
-        </p:txBody>
-      </p:sp>
-      <p:pic>
-        <p:nvPicPr>
-          <p:cNvPr id="8" name="图片 7">
-            <a:extLst>
-              <a:ext uri="{FF2B5EF4-FFF2-40B4-BE49-F238E27FC236}">
-                <a16:creationId xmlns:a16="http://schemas.microsoft.com/office/drawing/2014/main" id="{ADE28B5F-CBD4-830F-F15F-BB3D4BCB6922}"/>
-              </a:ext>
-            </a:extLst>
-          </p:cNvPr>
-          <p:cNvPicPr>
-            <a:picLocks noChangeAspect="1"/>
-          </p:cNvPicPr>
-          <p:nvPr/>
-        </p:nvPicPr>
-        <p:blipFill>
-          <a:blip r:embed="rId2"/>
-          <a:stretch>
-            <a:fillRect/>
-          </a:stretch>
-        </p:blipFill>
-        <p:spPr>
-          <a:xfrm>
-            <a:off x="1" y="2635741"/>
-            <a:ext cx="6510900" cy="4222259"/>
-          </a:xfrm>
-          <a:prstGeom prst="rect">
-            <a:avLst/>
-          </a:prstGeom>
-        </p:spPr>
-      </p:pic>
-      <p:pic>
-        <p:nvPicPr>
-          <p:cNvPr id="6" name="图片 5">
-            <a:extLst>
-              <a:ext uri="{FF2B5EF4-FFF2-40B4-BE49-F238E27FC236}">
-                <a16:creationId xmlns:a16="http://schemas.microsoft.com/office/drawing/2014/main" id="{597DAED7-2FB5-3F93-E243-D2AB85600908}"/>
-              </a:ext>
-            </a:extLst>
-          </p:cNvPr>
-          <p:cNvPicPr>
-            <a:picLocks noChangeAspect="1"/>
-          </p:cNvPicPr>
-          <p:nvPr/>
-        </p:nvPicPr>
-        <p:blipFill>
-          <a:blip r:embed="rId3"/>
-          <a:stretch>
-            <a:fillRect/>
-          </a:stretch>
-        </p:blipFill>
-        <p:spPr>
-          <a:xfrm>
-            <a:off x="6510901" y="0"/>
-            <a:ext cx="5681098" cy="6858000"/>
-          </a:xfrm>
-          <a:prstGeom prst="rect">
-            <a:avLst/>
-          </a:prstGeom>
-        </p:spPr>
-      </p:pic>
-    </p:spTree>
-    <p:extLst>
-      <p:ext uri="{BB962C8B-B14F-4D97-AF65-F5344CB8AC3E}">
-        <p14:creationId xmlns:p14="http://schemas.microsoft.com/office/powerpoint/2010/main" val="1689250814"/>
-      </p:ext>
-    </p:extLst>
-  </p:cSld>
-  <p:clrMapOvr>
-    <a:masterClrMapping/>
-  </p:clrMapOvr>
-</p:sld>
-</file>
-
-<file path=ppt/slides/slide7.xml><?xml version="1.0" encoding="utf-8"?>
-<p:sld xmlns:a="http://schemas.openxmlformats.org/drawingml/2006/main" xmlns:r="http://schemas.openxmlformats.org/officeDocument/2006/relationships" xmlns:p="http://schemas.openxmlformats.org/presentationml/2006/main">
-  <p:cSld>
-    <p:spTree>
-      <p:nvGrpSpPr>
-        <p:cNvPr id="1" name=""/>
-        <p:cNvGrpSpPr/>
-        <p:nvPr/>
-      </p:nvGrpSpPr>
-      <p:grpSpPr>
-        <a:xfrm>
-          <a:off x="0" y="0"/>
-          <a:ext cx="0" cy="0"/>
-          <a:chOff x="0" y="0"/>
-          <a:chExt cx="0" cy="0"/>
-        </a:xfrm>
-      </p:grpSpPr>
-      <p:sp>
-        <p:nvSpPr>
-          <p:cNvPr id="2" name="标题 1">
-            <a:extLst>
-              <a:ext uri="{FF2B5EF4-FFF2-40B4-BE49-F238E27FC236}">
-                <a16:creationId xmlns:a16="http://schemas.microsoft.com/office/drawing/2014/main" id="{C24C7C8E-BA93-8DA6-7F44-0DE045422661}"/>
-              </a:ext>
-            </a:extLst>
-          </p:cNvPr>
-          <p:cNvSpPr>
-            <a:spLocks noGrp="1"/>
-          </p:cNvSpPr>
-          <p:nvPr>
-            <p:ph type="title"/>
-          </p:nvPr>
-        </p:nvSpPr>
-        <p:spPr/>
-        <p:txBody>
-          <a:bodyPr/>
-          <a:lstStyle/>
-          <a:p>
-            <a:r>
-              <a:rPr lang="zh-CN" altLang="en-US" dirty="0"/>
-              <a:t>常见接口</a:t>
-            </a:r>
-          </a:p>
-        </p:txBody>
-      </p:sp>
-      <p:sp>
-        <p:nvSpPr>
-          <p:cNvPr id="4" name="内容占位符 3">
-            <a:extLst>
-              <a:ext uri="{FF2B5EF4-FFF2-40B4-BE49-F238E27FC236}">
-                <a16:creationId xmlns:a16="http://schemas.microsoft.com/office/drawing/2014/main" id="{C5F44374-BF35-4287-3117-D1D9B9F6DDC2}"/>
-              </a:ext>
-            </a:extLst>
-          </p:cNvPr>
-          <p:cNvSpPr>
-            <a:spLocks noGrp="1"/>
-          </p:cNvSpPr>
-          <p:nvPr>
-            <p:ph sz="half" idx="2"/>
-          </p:nvPr>
-        </p:nvSpPr>
-        <p:spPr>
-          <a:xfrm>
-            <a:off x="838200" y="1690688"/>
-            <a:ext cx="5181600" cy="4351338"/>
-          </a:xfrm>
-        </p:spPr>
-        <p:txBody>
-          <a:bodyPr/>
-          <a:lstStyle/>
-          <a:p>
-            <a:r>
-              <a:rPr lang="en-US" altLang="zh-CN" dirty="0"/>
-              <a:t>XT30/60</a:t>
-            </a:r>
-          </a:p>
-          <a:p>
-            <a:pPr marL="0" indent="0">
-              <a:buNone/>
-            </a:pPr>
-            <a:r>
-              <a:rPr lang="zh-CN" altLang="en-US" dirty="0"/>
-              <a:t>能过大电流，常用于功率线</a:t>
-            </a:r>
-            <a:endParaRPr lang="en-US" altLang="zh-CN" dirty="0"/>
-          </a:p>
-          <a:p>
-            <a:r>
-              <a:rPr lang="en-US" altLang="zh-CN" dirty="0"/>
-              <a:t>GH1.25</a:t>
-            </a:r>
-          </a:p>
-          <a:p>
-            <a:pPr marL="0" indent="0">
-              <a:buNone/>
-            </a:pPr>
-            <a:r>
-              <a:rPr lang="zh-CN" altLang="en-US" dirty="0"/>
-              <a:t>带锁扣，常用于信号线</a:t>
-            </a:r>
-            <a:endParaRPr lang="en-US" altLang="zh-CN" dirty="0"/>
-          </a:p>
-          <a:p>
-            <a:r>
-              <a:rPr lang="en-US" altLang="zh-CN" dirty="0"/>
-              <a:t>MX1.25</a:t>
-            </a:r>
-          </a:p>
-          <a:p>
-            <a:pPr marL="0" indent="0">
-              <a:buNone/>
-            </a:pPr>
-            <a:r>
-              <a:rPr lang="zh-CN" altLang="en-US" dirty="0"/>
-              <a:t>常用于烧录线</a:t>
-            </a:r>
-            <a:endParaRPr lang="en-US" altLang="zh-CN" dirty="0"/>
-          </a:p>
-        </p:txBody>
-      </p:sp>
-      <p:pic>
-        <p:nvPicPr>
-          <p:cNvPr id="8" name="内容占位符 7">
-            <a:extLst>
-              <a:ext uri="{FF2B5EF4-FFF2-40B4-BE49-F238E27FC236}">
-                <a16:creationId xmlns:a16="http://schemas.microsoft.com/office/drawing/2014/main" id="{D9EAE9ED-67F0-4E19-12CE-89257BB826BC}"/>
-              </a:ext>
-            </a:extLst>
-          </p:cNvPr>
-          <p:cNvPicPr>
-            <a:picLocks noGrp="1" noChangeAspect="1"/>
-          </p:cNvPicPr>
-          <p:nvPr>
-            <p:ph sz="half" idx="1"/>
-          </p:nvPr>
-        </p:nvPicPr>
-        <p:blipFill>
-          <a:blip r:embed="rId2">
-            <a:extLst>
-              <a:ext uri="{28A0092B-C50C-407E-A947-70E740481C1C}">
-                <a14:useLocalDpi xmlns:a14="http://schemas.microsoft.com/office/drawing/2010/main" val="0"/>
-              </a:ext>
-            </a:extLst>
-          </a:blip>
-          <a:stretch>
-            <a:fillRect/>
-          </a:stretch>
-        </p:blipFill>
-        <p:spPr>
-          <a:xfrm>
-            <a:off x="8764411" y="-1"/>
-            <a:ext cx="3427590" cy="3423311"/>
-          </a:xfrm>
-        </p:spPr>
-      </p:pic>
-      <p:sp>
-        <p:nvSpPr>
-          <p:cNvPr id="13" name="AutoShape 2" descr="Image result for GH1.25">
-            <a:hlinkClick r:id="rId3"/>
-            <a:extLst>
-              <a:ext uri="{FF2B5EF4-FFF2-40B4-BE49-F238E27FC236}">
-                <a16:creationId xmlns:a16="http://schemas.microsoft.com/office/drawing/2014/main" id="{9C70E040-D622-CFC2-6D1D-361B64295ACB}"/>
-              </a:ext>
-            </a:extLst>
-          </p:cNvPr>
-          <p:cNvSpPr>
-            <a:spLocks noChangeAspect="1" noChangeArrowheads="1"/>
-          </p:cNvSpPr>
-          <p:nvPr/>
-        </p:nvSpPr>
-        <p:spPr bwMode="auto">
-          <a:xfrm>
-            <a:off x="5210175" y="2543175"/>
-            <a:ext cx="1771650" cy="1771650"/>
-          </a:xfrm>
-          <a:prstGeom prst="rect">
-            <a:avLst/>
-          </a:prstGeom>
-          <a:noFill/>
-          <a:extLst>
-            <a:ext uri="{909E8E84-426E-40DD-AFC4-6F175D3DCCD1}">
-              <a14:hiddenFill xmlns:a14="http://schemas.microsoft.com/office/drawing/2010/main">
-                <a:solidFill>
-                  <a:srgbClr val="FFFFFF"/>
-                </a:solidFill>
-              </a14:hiddenFill>
-            </a:ext>
-          </a:extLst>
-        </p:spPr>
-        <p:txBody>
-          <a:bodyPr vert="horz" wrap="square" lIns="91440" tIns="45720" rIns="91440" bIns="45720" numCol="1" anchor="t" anchorCtr="0" compatLnSpc="1">
-            <a:prstTxWarp prst="textNoShape">
-              <a:avLst/>
-            </a:prstTxWarp>
-          </a:bodyPr>
-          <a:lstStyle/>
-          <a:p>
-            <a:endParaRPr lang="zh-CN" altLang="en-US"/>
-          </a:p>
-        </p:txBody>
-      </p:sp>
-      <p:pic>
-        <p:nvPicPr>
-          <p:cNvPr id="15" name="图片 14">
-            <a:extLst>
-              <a:ext uri="{FF2B5EF4-FFF2-40B4-BE49-F238E27FC236}">
-                <a16:creationId xmlns:a16="http://schemas.microsoft.com/office/drawing/2014/main" id="{B93F5982-812A-B0CD-9856-F77BDA165C18}"/>
-              </a:ext>
-            </a:extLst>
-          </p:cNvPr>
-          <p:cNvPicPr>
-            <a:picLocks noChangeAspect="1"/>
-          </p:cNvPicPr>
-          <p:nvPr/>
-        </p:nvPicPr>
-        <p:blipFill>
-          <a:blip r:embed="rId4">
-            <a:extLst>
-              <a:ext uri="{28A0092B-C50C-407E-A947-70E740481C1C}">
-                <a14:useLocalDpi xmlns:a14="http://schemas.microsoft.com/office/drawing/2010/main" val="0"/>
-              </a:ext>
-            </a:extLst>
-          </a:blip>
-          <a:stretch>
-            <a:fillRect/>
-          </a:stretch>
-        </p:blipFill>
-        <p:spPr>
-          <a:xfrm>
-            <a:off x="8764411" y="3423310"/>
-            <a:ext cx="3437613" cy="3437613"/>
-          </a:xfrm>
-          <a:prstGeom prst="rect">
-            <a:avLst/>
-          </a:prstGeom>
-        </p:spPr>
-      </p:pic>
-    </p:spTree>
-    <p:extLst>
-      <p:ext uri="{BB962C8B-B14F-4D97-AF65-F5344CB8AC3E}">
-        <p14:creationId xmlns:p14="http://schemas.microsoft.com/office/powerpoint/2010/main" val="2861687271"/>
-      </p:ext>
-    </p:extLst>
-  </p:cSld>
-  <p:clrMapOvr>
-    <a:masterClrMapping/>
-  </p:clrMapOvr>
-</p:sld>
-</file>
-
-<file path=ppt/slides/slide8.xml><?xml version="1.0" encoding="utf-8"?>
-<p:sld xmlns:a="http://schemas.openxmlformats.org/drawingml/2006/main" xmlns:r="http://schemas.openxmlformats.org/officeDocument/2006/relationships" xmlns:p="http://schemas.openxmlformats.org/presentationml/2006/main">
-  <p:cSld>
-    <p:spTree>
-      <p:nvGrpSpPr>
-        <p:cNvPr id="1" name=""/>
-        <p:cNvGrpSpPr/>
-        <p:nvPr/>
-      </p:nvGrpSpPr>
-      <p:grpSpPr>
-        <a:xfrm>
-          <a:off x="0" y="0"/>
-          <a:ext cx="0" cy="0"/>
-          <a:chOff x="0" y="0"/>
-          <a:chExt cx="0" cy="0"/>
-        </a:xfrm>
-      </p:grpSpPr>
-      <p:sp>
-        <p:nvSpPr>
-          <p:cNvPr id="2" name="标题 1">
-            <a:extLst>
-              <a:ext uri="{FF2B5EF4-FFF2-40B4-BE49-F238E27FC236}">
-                <a16:creationId xmlns:a16="http://schemas.microsoft.com/office/drawing/2014/main" id="{C24C7C8E-BA93-8DA6-7F44-0DE045422661}"/>
-              </a:ext>
-            </a:extLst>
-          </p:cNvPr>
-          <p:cNvSpPr>
-            <a:spLocks noGrp="1"/>
-          </p:cNvSpPr>
-          <p:nvPr>
-            <p:ph type="title"/>
-          </p:nvPr>
-        </p:nvSpPr>
-        <p:spPr/>
-        <p:txBody>
-          <a:bodyPr/>
-          <a:lstStyle/>
-          <a:p>
-            <a:r>
-              <a:rPr lang="zh-CN" altLang="en-US" dirty="0"/>
-              <a:t>常见线材</a:t>
-            </a:r>
-          </a:p>
-        </p:txBody>
-      </p:sp>
-      <p:pic>
-        <p:nvPicPr>
-          <p:cNvPr id="6" name="内容占位符 5">
-            <a:extLst>
-              <a:ext uri="{FF2B5EF4-FFF2-40B4-BE49-F238E27FC236}">
-                <a16:creationId xmlns:a16="http://schemas.microsoft.com/office/drawing/2014/main" id="{3F11D634-38BE-8516-AFF0-43FE5F48ED38}"/>
-              </a:ext>
-            </a:extLst>
-          </p:cNvPr>
-          <p:cNvPicPr>
-            <a:picLocks noGrp="1" noChangeAspect="1"/>
-          </p:cNvPicPr>
-          <p:nvPr>
-            <p:ph sz="half" idx="1"/>
-          </p:nvPr>
-        </p:nvPicPr>
-        <p:blipFill>
-          <a:blip r:embed="rId2">
-            <a:extLst>
-              <a:ext uri="{28A0092B-C50C-407E-A947-70E740481C1C}">
-                <a14:useLocalDpi xmlns:a14="http://schemas.microsoft.com/office/drawing/2010/main" val="0"/>
-              </a:ext>
-            </a:extLst>
-          </a:blip>
-          <a:stretch>
-            <a:fillRect/>
-          </a:stretch>
-        </p:blipFill>
-        <p:spPr>
-          <a:xfrm>
-            <a:off x="6096000" y="2661334"/>
-            <a:ext cx="5181600" cy="1205023"/>
-          </a:xfrm>
-        </p:spPr>
-      </p:pic>
-      <p:sp>
-        <p:nvSpPr>
-          <p:cNvPr id="4" name="内容占位符 3">
-            <a:extLst>
-              <a:ext uri="{FF2B5EF4-FFF2-40B4-BE49-F238E27FC236}">
-                <a16:creationId xmlns:a16="http://schemas.microsoft.com/office/drawing/2014/main" id="{C5F44374-BF35-4287-3117-D1D9B9F6DDC2}"/>
-              </a:ext>
-            </a:extLst>
-          </p:cNvPr>
-          <p:cNvSpPr>
-            <a:spLocks noGrp="1"/>
-          </p:cNvSpPr>
-          <p:nvPr>
-            <p:ph sz="half" idx="2"/>
-          </p:nvPr>
-        </p:nvSpPr>
-        <p:spPr>
-          <a:xfrm>
-            <a:off x="838200" y="1690688"/>
-            <a:ext cx="5181600" cy="4351338"/>
-          </a:xfrm>
-        </p:spPr>
-        <p:txBody>
-          <a:bodyPr/>
-          <a:lstStyle/>
-          <a:p>
-            <a:r>
-              <a:rPr lang="zh-CN" altLang="en-US" dirty="0"/>
-              <a:t>硅胶线：软但易破易脱落</a:t>
-            </a:r>
-            <a:endParaRPr lang="en-US" altLang="zh-CN" dirty="0"/>
-          </a:p>
-          <a:p>
-            <a:r>
-              <a:rPr lang="zh-CN" altLang="en-US" dirty="0"/>
-              <a:t>铁氟龙线：结实但硬，不易弯折</a:t>
-            </a:r>
-            <a:endParaRPr lang="en-US" altLang="zh-CN" dirty="0"/>
-          </a:p>
-          <a:p>
-            <a:r>
-              <a:rPr lang="zh-CN" altLang="en-US" dirty="0"/>
-              <a:t>屏蔽双绞线缆：粗而重，不易弯折，一般仅用于高速差分信号</a:t>
-            </a:r>
-            <a:endParaRPr lang="en-US" altLang="zh-CN" dirty="0"/>
-          </a:p>
-          <a:p>
-            <a:endParaRPr lang="zh-CN" altLang="en-US" dirty="0"/>
-          </a:p>
-        </p:txBody>
-      </p:sp>
-    </p:spTree>
-    <p:extLst>
-      <p:ext uri="{BB962C8B-B14F-4D97-AF65-F5344CB8AC3E}">
-        <p14:creationId xmlns:p14="http://schemas.microsoft.com/office/powerpoint/2010/main" val="2703905542"/>
-      </p:ext>
-    </p:extLst>
-  </p:cSld>
-  <p:clrMapOvr>
-    <a:masterClrMapping/>
-  </p:clrMapOvr>
-  <p:timing>
-    <p:tnLst>
-      <p:par>
-        <p:cTn id="1" dur="indefinite" restart="never" nodeType="tmRoot">
-          <p:childTnLst>
-            <p:seq concurrent="1" nextAc="seek">
-              <p:cTn id="2" dur="indefinite" nodeType="mainSeq">
-                <p:childTnLst>
-                  <p:par>
-                    <p:cTn id="3" fill="hold">
-                      <p:stCondLst>
-                        <p:cond delay="indefinite"/>
-                      </p:stCondLst>
-                      <p:childTnLst>
-                        <p:par>
-                          <p:cTn id="4" fill="hold">
-                            <p:stCondLst>
-                              <p:cond delay="0"/>
-                            </p:stCondLst>
-                            <p:childTnLst>
-                              <p:par>
-                                <p:cTn id="5" presetID="1" presetClass="entr" presetSubtype="0" fill="hold" nodeType="clickEffect">
-                                  <p:stCondLst>
-                                    <p:cond delay="0"/>
-                                  </p:stCondLst>
-                                  <p:childTnLst>
-                                    <p:set>
-                                      <p:cBhvr>
-                                        <p:cTn id="6" dur="1" fill="hold">
-                                          <p:stCondLst>
-                                            <p:cond delay="0"/>
-                                          </p:stCondLst>
-                                        </p:cTn>
-                                        <p:tgtEl>
-                                          <p:spTgt spid="6"/>
-                                        </p:tgtEl>
-                                        <p:attrNameLst>
-                                          <p:attrName>style.visibility</p:attrName>
-                                        </p:attrNameLst>
-                                      </p:cBhvr>
-                                      <p:to>
-                                        <p:strVal val="visible"/>
-                                      </p:to>
-                                    </p:set>
-                                  </p:childTnLst>
-                                </p:cTn>
-                              </p:par>
-                            </p:childTnLst>
-                          </p:cTn>
-                        </p:par>
-                      </p:childTnLst>
-                    </p:cTn>
-                  </p:par>
-                </p:childTnLst>
-              </p:cTn>
-              <p:prevCondLst>
-                <p:cond evt="onPrev" delay="0">
-                  <p:tgtEl>
-                    <p:sldTgt/>
-                  </p:tgtEl>
-                </p:cond>
-              </p:prevCondLst>
-              <p:nextCondLst>
-                <p:cond evt="onNext" delay="0">
-                  <p:tgtEl>
-                    <p:sldTgt/>
-                  </p:tgtEl>
-                </p:cond>
-              </p:nextCondLst>
-            </p:seq>
-          </p:childTnLst>
-        </p:cTn>
-      </p:par>
-    </p:tnLst>
-  </p:timing>
-</p:sld>
-</file>
-
-<file path=ppt/slides/slide9.xml><?xml version="1.0" encoding="utf-8"?>
-<p:sld xmlns:a="http://schemas.openxmlformats.org/drawingml/2006/main" xmlns:r="http://schemas.openxmlformats.org/officeDocument/2006/relationships" xmlns:p="http://schemas.openxmlformats.org/presentationml/2006/main">
-  <p:cSld>
-    <p:spTree>
-      <p:nvGrpSpPr>
-        <p:cNvPr id="1" name=""/>
-        <p:cNvGrpSpPr/>
-        <p:nvPr/>
-      </p:nvGrpSpPr>
-      <p:grpSpPr>
-        <a:xfrm>
-          <a:off x="0" y="0"/>
-          <a:ext cx="0" cy="0"/>
-          <a:chOff x="0" y="0"/>
-          <a:chExt cx="0" cy="0"/>
-        </a:xfrm>
-      </p:grpSpPr>
-      <p:sp>
-        <p:nvSpPr>
-          <p:cNvPr id="2" name="标题 1">
-            <a:extLst>
-              <a:ext uri="{FF2B5EF4-FFF2-40B4-BE49-F238E27FC236}">
                 <a16:creationId xmlns:a16="http://schemas.microsoft.com/office/drawing/2014/main" id="{859A17AC-48F0-1350-AA86-2A6A0C9E1F61}"/>
               </a:ext>
             </a:extLst>
@@ -6077,6 +3934,2607 @@
   <p:clrMapOvr>
     <a:masterClrMapping/>
   </p:clrMapOvr>
+</p:sld>
+</file>
+
+<file path=ppt/slides/slide11.xml><?xml version="1.0" encoding="utf-8"?>
+<p:sld xmlns:a="http://schemas.openxmlformats.org/drawingml/2006/main" xmlns:r="http://schemas.openxmlformats.org/officeDocument/2006/relationships" xmlns:p="http://schemas.openxmlformats.org/presentationml/2006/main">
+  <p:cSld>
+    <p:spTree>
+      <p:nvGrpSpPr>
+        <p:cNvPr id="1" name=""/>
+        <p:cNvGrpSpPr/>
+        <p:nvPr/>
+      </p:nvGrpSpPr>
+      <p:grpSpPr>
+        <a:xfrm>
+          <a:off x="0" y="0"/>
+          <a:ext cx="0" cy="0"/>
+          <a:chOff x="0" y="0"/>
+          <a:chExt cx="0" cy="0"/>
+        </a:xfrm>
+      </p:grpSpPr>
+      <p:sp>
+        <p:nvSpPr>
+          <p:cNvPr id="2" name="标题 1">
+            <a:extLst>
+              <a:ext uri="{FF2B5EF4-FFF2-40B4-BE49-F238E27FC236}">
+                <a16:creationId xmlns:a16="http://schemas.microsoft.com/office/drawing/2014/main" id="{F1E7E7DE-A1C5-DE2C-8485-83CD0B7840D3}"/>
+              </a:ext>
+            </a:extLst>
+          </p:cNvPr>
+          <p:cNvSpPr>
+            <a:spLocks noGrp="1"/>
+          </p:cNvSpPr>
+          <p:nvPr>
+            <p:ph type="title"/>
+          </p:nvPr>
+        </p:nvSpPr>
+        <p:spPr/>
+        <p:txBody>
+          <a:bodyPr/>
+          <a:lstStyle/>
+          <a:p>
+            <a:r>
+              <a:rPr lang="zh-CN" altLang="en-US" dirty="0"/>
+              <a:t>定长</a:t>
+            </a:r>
+            <a:endParaRPr lang="zh-SG" altLang="en-US" dirty="0"/>
+          </a:p>
+        </p:txBody>
+      </p:sp>
+      <p:sp>
+        <p:nvSpPr>
+          <p:cNvPr id="3" name="内容占位符 2">
+            <a:extLst>
+              <a:ext uri="{FF2B5EF4-FFF2-40B4-BE49-F238E27FC236}">
+                <a16:creationId xmlns:a16="http://schemas.microsoft.com/office/drawing/2014/main" id="{AFD37560-1E4A-9D22-69CF-D52811E72FDE}"/>
+              </a:ext>
+            </a:extLst>
+          </p:cNvPr>
+          <p:cNvSpPr>
+            <a:spLocks noGrp="1"/>
+          </p:cNvSpPr>
+          <p:nvPr>
+            <p:ph sz="half" idx="1"/>
+          </p:nvPr>
+        </p:nvSpPr>
+        <p:spPr/>
+        <p:txBody>
+          <a:bodyPr/>
+          <a:lstStyle/>
+          <a:p>
+            <a:pPr marL="0" indent="0">
+              <a:buNone/>
+            </a:pPr>
+            <a:r>
+              <a:rPr lang="zh-CN" altLang="en-US" dirty="0"/>
+              <a:t>规划线路</a:t>
+            </a:r>
+            <a:endParaRPr lang="en-US" altLang="zh-CN" dirty="0"/>
+          </a:p>
+          <a:p>
+            <a:r>
+              <a:rPr lang="zh-CN" altLang="en-US" dirty="0"/>
+              <a:t>有方便固定的点位</a:t>
+            </a:r>
+            <a:endParaRPr lang="en-US" altLang="zh-CN" dirty="0"/>
+          </a:p>
+          <a:p>
+            <a:r>
+              <a:rPr lang="zh-CN" altLang="en-US" dirty="0"/>
+              <a:t>避免受拉</a:t>
+            </a:r>
+            <a:r>
+              <a:rPr lang="en-US" altLang="zh-CN" dirty="0"/>
+              <a:t>/</a:t>
+            </a:r>
+            <a:r>
+              <a:rPr lang="zh-CN" altLang="en-US" dirty="0"/>
+              <a:t>受压</a:t>
+            </a:r>
+            <a:r>
+              <a:rPr lang="en-US" altLang="zh-CN" dirty="0"/>
+              <a:t>/</a:t>
+            </a:r>
+            <a:r>
+              <a:rPr lang="zh-CN" altLang="en-US" dirty="0"/>
+              <a:t>受击</a:t>
+            </a:r>
+            <a:endParaRPr lang="en-US" altLang="zh-CN" dirty="0"/>
+          </a:p>
+          <a:p>
+            <a:r>
+              <a:rPr lang="zh-CN" altLang="en-US" dirty="0"/>
+              <a:t>可通过分电板引出分支</a:t>
+            </a:r>
+            <a:endParaRPr lang="en-US" altLang="zh-CN" dirty="0"/>
+          </a:p>
+          <a:p>
+            <a:r>
+              <a:rPr lang="zh-CN" altLang="en-US" dirty="0"/>
+              <a:t>信号线布设时应尽量符合标准，如</a:t>
+            </a:r>
+            <a:r>
+              <a:rPr lang="en-US" altLang="zh-CN" dirty="0"/>
+              <a:t>CAN</a:t>
+            </a:r>
+            <a:r>
+              <a:rPr lang="zh-CN" altLang="en-US" dirty="0"/>
+              <a:t>线应尽量缩短支路</a:t>
+            </a:r>
+            <a:endParaRPr lang="en-US" altLang="zh-CN" dirty="0"/>
+          </a:p>
+        </p:txBody>
+      </p:sp>
+      <p:sp>
+        <p:nvSpPr>
+          <p:cNvPr id="4" name="内容占位符 3">
+            <a:extLst>
+              <a:ext uri="{FF2B5EF4-FFF2-40B4-BE49-F238E27FC236}">
+                <a16:creationId xmlns:a16="http://schemas.microsoft.com/office/drawing/2014/main" id="{B576A1A1-D026-5BB2-3113-CAF4D0710DB9}"/>
+              </a:ext>
+            </a:extLst>
+          </p:cNvPr>
+          <p:cNvSpPr>
+            <a:spLocks noGrp="1"/>
+          </p:cNvSpPr>
+          <p:nvPr>
+            <p:ph sz="half" idx="2"/>
+          </p:nvPr>
+        </p:nvSpPr>
+        <p:spPr/>
+        <p:txBody>
+          <a:bodyPr/>
+          <a:lstStyle/>
+          <a:p>
+            <a:pPr marL="0" indent="0">
+              <a:buNone/>
+            </a:pPr>
+            <a:r>
+              <a:rPr lang="zh-CN" altLang="en-US" dirty="0"/>
+              <a:t>留余量</a:t>
+            </a:r>
+            <a:endParaRPr lang="en-US" altLang="zh-CN" dirty="0"/>
+          </a:p>
+          <a:p>
+            <a:r>
+              <a:rPr lang="zh-CN" altLang="en-US" dirty="0"/>
+              <a:t>旋转、平移到限位时不扯线</a:t>
+            </a:r>
+            <a:endParaRPr lang="en-US" altLang="zh-CN" dirty="0"/>
+          </a:p>
+          <a:p>
+            <a:r>
+              <a:rPr lang="zh-CN" altLang="en-US" dirty="0"/>
+              <a:t>检修时为了不增加焊点数量，会越剪越短</a:t>
+            </a:r>
+            <a:endParaRPr lang="zh-SG" altLang="en-US" dirty="0"/>
+          </a:p>
+        </p:txBody>
+      </p:sp>
+      <p:pic>
+        <p:nvPicPr>
+          <p:cNvPr id="5" name="图片 4">
+            <a:extLst>
+              <a:ext uri="{FF2B5EF4-FFF2-40B4-BE49-F238E27FC236}">
+                <a16:creationId xmlns:a16="http://schemas.microsoft.com/office/drawing/2014/main" id="{AA73D6EC-6AA7-41E5-ACA8-AA57BC87C3F1}"/>
+              </a:ext>
+            </a:extLst>
+          </p:cNvPr>
+          <p:cNvPicPr>
+            <a:picLocks noChangeAspect="1"/>
+          </p:cNvPicPr>
+          <p:nvPr/>
+        </p:nvPicPr>
+        <p:blipFill>
+          <a:blip r:embed="rId2"/>
+          <a:stretch>
+            <a:fillRect/>
+          </a:stretch>
+        </p:blipFill>
+        <p:spPr>
+          <a:xfrm>
+            <a:off x="838200" y="4885033"/>
+            <a:ext cx="6096000" cy="1291930"/>
+          </a:xfrm>
+          <a:prstGeom prst="rect">
+            <a:avLst/>
+          </a:prstGeom>
+        </p:spPr>
+      </p:pic>
+    </p:spTree>
+    <p:extLst>
+      <p:ext uri="{BB962C8B-B14F-4D97-AF65-F5344CB8AC3E}">
+        <p14:creationId xmlns:p14="http://schemas.microsoft.com/office/powerpoint/2010/main" val="3006708727"/>
+      </p:ext>
+    </p:extLst>
+  </p:cSld>
+  <p:clrMapOvr>
+    <a:masterClrMapping/>
+  </p:clrMapOvr>
+</p:sld>
+</file>
+
+<file path=ppt/slides/slide12.xml><?xml version="1.0" encoding="utf-8"?>
+<p:sld xmlns:a="http://schemas.openxmlformats.org/drawingml/2006/main" xmlns:r="http://schemas.openxmlformats.org/officeDocument/2006/relationships" xmlns:p="http://schemas.openxmlformats.org/presentationml/2006/main">
+  <p:cSld>
+    <p:spTree>
+      <p:nvGrpSpPr>
+        <p:cNvPr id="1" name=""/>
+        <p:cNvGrpSpPr/>
+        <p:nvPr/>
+      </p:nvGrpSpPr>
+      <p:grpSpPr>
+        <a:xfrm>
+          <a:off x="0" y="0"/>
+          <a:ext cx="0" cy="0"/>
+          <a:chOff x="0" y="0"/>
+          <a:chExt cx="0" cy="0"/>
+        </a:xfrm>
+      </p:grpSpPr>
+      <p:sp>
+        <p:nvSpPr>
+          <p:cNvPr id="2" name="标题 1">
+            <a:extLst>
+              <a:ext uri="{FF2B5EF4-FFF2-40B4-BE49-F238E27FC236}">
+                <a16:creationId xmlns:a16="http://schemas.microsoft.com/office/drawing/2014/main" id="{09C38C44-564C-99CB-22AF-13091DEAEA3A}"/>
+              </a:ext>
+            </a:extLst>
+          </p:cNvPr>
+          <p:cNvSpPr>
+            <a:spLocks noGrp="1"/>
+          </p:cNvSpPr>
+          <p:nvPr>
+            <p:ph type="title"/>
+          </p:nvPr>
+        </p:nvSpPr>
+        <p:spPr/>
+        <p:txBody>
+          <a:bodyPr/>
+          <a:lstStyle/>
+          <a:p>
+            <a:r>
+              <a:rPr lang="zh-CN" altLang="en-US" dirty="0"/>
+              <a:t>焊接要求与技巧</a:t>
+            </a:r>
+          </a:p>
+        </p:txBody>
+      </p:sp>
+      <p:sp>
+        <p:nvSpPr>
+          <p:cNvPr id="3" name="内容占位符 2">
+            <a:extLst>
+              <a:ext uri="{FF2B5EF4-FFF2-40B4-BE49-F238E27FC236}">
+                <a16:creationId xmlns:a16="http://schemas.microsoft.com/office/drawing/2014/main" id="{53B0FE35-D810-2542-3664-7B1FF5DC7514}"/>
+              </a:ext>
+            </a:extLst>
+          </p:cNvPr>
+          <p:cNvSpPr>
+            <a:spLocks noGrp="1"/>
+          </p:cNvSpPr>
+          <p:nvPr>
+            <p:ph sz="half" idx="1"/>
+          </p:nvPr>
+        </p:nvSpPr>
+        <p:spPr>
+          <a:xfrm>
+            <a:off x="838200" y="1549179"/>
+            <a:ext cx="5181600" cy="4351338"/>
+          </a:xfrm>
+        </p:spPr>
+        <p:txBody>
+          <a:bodyPr/>
+          <a:lstStyle/>
+          <a:p>
+            <a:r>
+              <a:rPr lang="zh-CN" altLang="en-US" dirty="0"/>
+              <a:t>焊点圆润饱满，完全浸润线芯</a:t>
+            </a:r>
+            <a:endParaRPr lang="en-US" altLang="zh-CN" dirty="0"/>
+          </a:p>
+          <a:p>
+            <a:r>
+              <a:rPr lang="zh-CN" altLang="en-US" dirty="0"/>
+              <a:t>尽量短小，浸润锡的线难弯折</a:t>
+            </a:r>
+            <a:endParaRPr lang="en-US" altLang="zh-CN" dirty="0"/>
+          </a:p>
+          <a:p>
+            <a:r>
+              <a:rPr lang="zh-CN" altLang="en-US" dirty="0"/>
+              <a:t>无尖刺，避免刺破热缩管</a:t>
+            </a:r>
+            <a:endParaRPr lang="en-US" altLang="zh-CN" dirty="0"/>
+          </a:p>
+        </p:txBody>
+      </p:sp>
+      <p:sp>
+        <p:nvSpPr>
+          <p:cNvPr id="4" name="内容占位符 3">
+            <a:extLst>
+              <a:ext uri="{FF2B5EF4-FFF2-40B4-BE49-F238E27FC236}">
+                <a16:creationId xmlns:a16="http://schemas.microsoft.com/office/drawing/2014/main" id="{5BC1A8FE-8B09-8ADD-E6FE-C6E13855D3E1}"/>
+              </a:ext>
+            </a:extLst>
+          </p:cNvPr>
+          <p:cNvSpPr>
+            <a:spLocks noGrp="1"/>
+          </p:cNvSpPr>
+          <p:nvPr>
+            <p:ph sz="half" idx="2"/>
+          </p:nvPr>
+        </p:nvSpPr>
+        <p:spPr>
+          <a:xfrm>
+            <a:off x="6172200" y="1690688"/>
+            <a:ext cx="5181600" cy="4351338"/>
+          </a:xfrm>
+        </p:spPr>
+        <p:txBody>
+          <a:bodyPr/>
+          <a:lstStyle/>
+          <a:p>
+            <a:r>
+              <a:rPr lang="zh-CN" altLang="en-US" dirty="0"/>
+              <a:t>信号线较细，可以将线芯扭成一个小结后上锡，也可以各自上锡后搭到一起；功率线较粗，可以各剪去一半线芯后搭在一起焊</a:t>
+            </a:r>
+            <a:endParaRPr lang="en-US" altLang="zh-CN" dirty="0"/>
+          </a:p>
+          <a:p>
+            <a:r>
+              <a:rPr lang="zh-CN" altLang="en-US" dirty="0"/>
+              <a:t>烙铁</a:t>
+            </a:r>
+            <a:r>
+              <a:rPr lang="en-US" altLang="zh-CN" dirty="0"/>
+              <a:t>320</a:t>
+            </a:r>
+            <a:r>
+              <a:rPr lang="zh-CN" altLang="en-US" dirty="0"/>
+              <a:t>度及以上，寻找合适角度增大接触面</a:t>
+            </a:r>
+            <a:endParaRPr lang="en-US" altLang="zh-CN" dirty="0"/>
+          </a:p>
+          <a:p>
+            <a:r>
+              <a:rPr lang="zh-CN" altLang="en-US" dirty="0"/>
+              <a:t>充分加热，若焊锡氧化可使用锡丝中的松香进行还原</a:t>
+            </a:r>
+            <a:endParaRPr lang="en-US" altLang="zh-CN" dirty="0"/>
+          </a:p>
+          <a:p>
+            <a:r>
+              <a:rPr lang="zh-CN" altLang="en-US" dirty="0"/>
+              <a:t>尽量固定线端，避免滑落</a:t>
+            </a:r>
+            <a:endParaRPr lang="en-US" altLang="zh-CN" dirty="0"/>
+          </a:p>
+        </p:txBody>
+      </p:sp>
+      <p:pic>
+        <p:nvPicPr>
+          <p:cNvPr id="6" name="图片 5">
+            <a:extLst>
+              <a:ext uri="{FF2B5EF4-FFF2-40B4-BE49-F238E27FC236}">
+                <a16:creationId xmlns:a16="http://schemas.microsoft.com/office/drawing/2014/main" id="{A7FCB60B-CED1-ADB6-029E-294C530F016D}"/>
+              </a:ext>
+            </a:extLst>
+          </p:cNvPr>
+          <p:cNvPicPr>
+            <a:picLocks noChangeAspect="1"/>
+          </p:cNvPicPr>
+          <p:nvPr/>
+        </p:nvPicPr>
+        <p:blipFill>
+          <a:blip r:embed="rId2">
+            <a:extLst>
+              <a:ext uri="{28A0092B-C50C-407E-A947-70E740481C1C}">
+                <a14:useLocalDpi xmlns:a14="http://schemas.microsoft.com/office/drawing/2010/main" val="0"/>
+              </a:ext>
+            </a:extLst>
+          </a:blip>
+          <a:stretch>
+            <a:fillRect/>
+          </a:stretch>
+        </p:blipFill>
+        <p:spPr>
+          <a:xfrm>
+            <a:off x="3292014" y="3016251"/>
+            <a:ext cx="2880185" cy="3841749"/>
+          </a:xfrm>
+          <a:prstGeom prst="rect">
+            <a:avLst/>
+          </a:prstGeom>
+        </p:spPr>
+      </p:pic>
+    </p:spTree>
+    <p:extLst>
+      <p:ext uri="{BB962C8B-B14F-4D97-AF65-F5344CB8AC3E}">
+        <p14:creationId xmlns:p14="http://schemas.microsoft.com/office/powerpoint/2010/main" val="2495693831"/>
+      </p:ext>
+    </p:extLst>
+  </p:cSld>
+  <p:clrMapOvr>
+    <a:masterClrMapping/>
+  </p:clrMapOvr>
+  <p:timing>
+    <p:tnLst>
+      <p:par>
+        <p:cTn id="1" dur="indefinite" restart="never" nodeType="tmRoot">
+          <p:childTnLst>
+            <p:seq concurrent="1" nextAc="seek">
+              <p:cTn id="2" dur="indefinite" nodeType="mainSeq">
+                <p:childTnLst>
+                  <p:par>
+                    <p:cTn id="3" fill="hold">
+                      <p:stCondLst>
+                        <p:cond delay="indefinite"/>
+                      </p:stCondLst>
+                      <p:childTnLst>
+                        <p:par>
+                          <p:cTn id="4" fill="hold">
+                            <p:stCondLst>
+                              <p:cond delay="0"/>
+                            </p:stCondLst>
+                            <p:childTnLst>
+                              <p:par>
+                                <p:cTn id="5" presetID="1" presetClass="entr" presetSubtype="0" fill="hold" nodeType="clickEffect">
+                                  <p:stCondLst>
+                                    <p:cond delay="0"/>
+                                  </p:stCondLst>
+                                  <p:childTnLst>
+                                    <p:set>
+                                      <p:cBhvr>
+                                        <p:cTn id="6" dur="1" fill="hold">
+                                          <p:stCondLst>
+                                            <p:cond delay="0"/>
+                                          </p:stCondLst>
+                                        </p:cTn>
+                                        <p:tgtEl>
+                                          <p:spTgt spid="6"/>
+                                        </p:tgtEl>
+                                        <p:attrNameLst>
+                                          <p:attrName>style.visibility</p:attrName>
+                                        </p:attrNameLst>
+                                      </p:cBhvr>
+                                      <p:to>
+                                        <p:strVal val="visible"/>
+                                      </p:to>
+                                    </p:set>
+                                  </p:childTnLst>
+                                </p:cTn>
+                              </p:par>
+                            </p:childTnLst>
+                          </p:cTn>
+                        </p:par>
+                      </p:childTnLst>
+                    </p:cTn>
+                  </p:par>
+                </p:childTnLst>
+              </p:cTn>
+              <p:prevCondLst>
+                <p:cond evt="onPrev" delay="0">
+                  <p:tgtEl>
+                    <p:sldTgt/>
+                  </p:tgtEl>
+                </p:cond>
+              </p:prevCondLst>
+              <p:nextCondLst>
+                <p:cond evt="onNext" delay="0">
+                  <p:tgtEl>
+                    <p:sldTgt/>
+                  </p:tgtEl>
+                </p:cond>
+              </p:nextCondLst>
+            </p:seq>
+          </p:childTnLst>
+        </p:cTn>
+      </p:par>
+    </p:tnLst>
+  </p:timing>
+</p:sld>
+</file>
+
+<file path=ppt/slides/slide13.xml><?xml version="1.0" encoding="utf-8"?>
+<p:sld xmlns:a="http://schemas.openxmlformats.org/drawingml/2006/main" xmlns:r="http://schemas.openxmlformats.org/officeDocument/2006/relationships" xmlns:p="http://schemas.openxmlformats.org/presentationml/2006/main">
+  <p:cSld>
+    <p:spTree>
+      <p:nvGrpSpPr>
+        <p:cNvPr id="1" name=""/>
+        <p:cNvGrpSpPr/>
+        <p:nvPr/>
+      </p:nvGrpSpPr>
+      <p:grpSpPr>
+        <a:xfrm>
+          <a:off x="0" y="0"/>
+          <a:ext cx="0" cy="0"/>
+          <a:chOff x="0" y="0"/>
+          <a:chExt cx="0" cy="0"/>
+        </a:xfrm>
+      </p:grpSpPr>
+      <p:sp>
+        <p:nvSpPr>
+          <p:cNvPr id="2" name="标题 1">
+            <a:extLst>
+              <a:ext uri="{FF2B5EF4-FFF2-40B4-BE49-F238E27FC236}">
+                <a16:creationId xmlns:a16="http://schemas.microsoft.com/office/drawing/2014/main" id="{D52A8CDA-50C5-66B2-64D0-738D7DFDD951}"/>
+              </a:ext>
+            </a:extLst>
+          </p:cNvPr>
+          <p:cNvSpPr>
+            <a:spLocks noGrp="1"/>
+          </p:cNvSpPr>
+          <p:nvPr>
+            <p:ph type="title"/>
+          </p:nvPr>
+        </p:nvSpPr>
+        <p:spPr/>
+        <p:txBody>
+          <a:bodyPr/>
+          <a:lstStyle/>
+          <a:p>
+            <a:r>
+              <a:rPr lang="zh-CN" altLang="en-US" dirty="0"/>
+              <a:t>绝缘、保护和固定</a:t>
+            </a:r>
+          </a:p>
+        </p:txBody>
+      </p:sp>
+      <p:sp>
+        <p:nvSpPr>
+          <p:cNvPr id="3" name="内容占位符 2">
+            <a:extLst>
+              <a:ext uri="{FF2B5EF4-FFF2-40B4-BE49-F238E27FC236}">
+                <a16:creationId xmlns:a16="http://schemas.microsoft.com/office/drawing/2014/main" id="{78C4DE1F-F4F2-53A9-AAAD-4E9BED0C7965}"/>
+              </a:ext>
+            </a:extLst>
+          </p:cNvPr>
+          <p:cNvSpPr>
+            <a:spLocks noGrp="1"/>
+          </p:cNvSpPr>
+          <p:nvPr>
+            <p:ph sz="half" idx="1"/>
+          </p:nvPr>
+        </p:nvSpPr>
+        <p:spPr/>
+        <p:txBody>
+          <a:bodyPr/>
+          <a:lstStyle/>
+          <a:p>
+            <a:pPr marL="0" indent="0">
+              <a:buNone/>
+            </a:pPr>
+            <a:r>
+              <a:rPr lang="zh-CN" altLang="en-US" dirty="0"/>
+              <a:t>绝缘：</a:t>
+            </a:r>
+            <a:endParaRPr lang="en-US" altLang="zh-CN" dirty="0"/>
+          </a:p>
+          <a:p>
+            <a:r>
+              <a:rPr lang="zh-CN" altLang="en-US" dirty="0"/>
+              <a:t>热缩管套住焊点</a:t>
+            </a:r>
+            <a:endParaRPr lang="en-US" altLang="zh-CN" dirty="0"/>
+          </a:p>
+          <a:p>
+            <a:r>
+              <a:rPr lang="zh-CN" altLang="en-US" dirty="0"/>
+              <a:t>三防漆覆盖焊盘</a:t>
+            </a:r>
+            <a:endParaRPr lang="en-US" altLang="zh-CN" dirty="0"/>
+          </a:p>
+          <a:p>
+            <a:r>
+              <a:rPr lang="zh-CN" altLang="en-US" dirty="0"/>
+              <a:t>醋酸布包裹</a:t>
+            </a:r>
+          </a:p>
+        </p:txBody>
+      </p:sp>
+      <p:sp>
+        <p:nvSpPr>
+          <p:cNvPr id="4" name="内容占位符 3">
+            <a:extLst>
+              <a:ext uri="{FF2B5EF4-FFF2-40B4-BE49-F238E27FC236}">
+                <a16:creationId xmlns:a16="http://schemas.microsoft.com/office/drawing/2014/main" id="{0DEDB503-B7DA-42A2-9DBE-0779BB9FF5B8}"/>
+              </a:ext>
+            </a:extLst>
+          </p:cNvPr>
+          <p:cNvSpPr>
+            <a:spLocks noGrp="1"/>
+          </p:cNvSpPr>
+          <p:nvPr>
+            <p:ph sz="half" idx="2"/>
+          </p:nvPr>
+        </p:nvSpPr>
+        <p:spPr>
+          <a:xfrm>
+            <a:off x="3786808" y="1825625"/>
+            <a:ext cx="5181600" cy="4351338"/>
+          </a:xfrm>
+        </p:spPr>
+        <p:txBody>
+          <a:bodyPr/>
+          <a:lstStyle/>
+          <a:p>
+            <a:pPr marL="0" indent="0">
+              <a:buNone/>
+            </a:pPr>
+            <a:r>
+              <a:rPr lang="zh-CN" altLang="en-US" dirty="0"/>
+              <a:t>保护：</a:t>
+            </a:r>
+            <a:endParaRPr lang="en-US" altLang="zh-CN" dirty="0"/>
+          </a:p>
+          <a:p>
+            <a:r>
+              <a:rPr lang="zh-CN" altLang="en-US" dirty="0"/>
+              <a:t>束线管</a:t>
+            </a:r>
+            <a:endParaRPr lang="en-US" altLang="zh-CN" dirty="0"/>
+          </a:p>
+          <a:p>
+            <a:r>
+              <a:rPr lang="zh-CN" altLang="en-US" dirty="0"/>
+              <a:t>蛇皮管</a:t>
+            </a:r>
+            <a:endParaRPr lang="en-US" altLang="zh-CN" dirty="0"/>
+          </a:p>
+          <a:p>
+            <a:r>
+              <a:rPr lang="zh-CN" altLang="en-US" dirty="0"/>
+              <a:t>拷打机械留出线槽</a:t>
+            </a:r>
+            <a:endParaRPr lang="en-US" altLang="zh-CN" dirty="0"/>
+          </a:p>
+        </p:txBody>
+      </p:sp>
+      <p:sp>
+        <p:nvSpPr>
+          <p:cNvPr id="5" name="内容占位符 3">
+            <a:extLst>
+              <a:ext uri="{FF2B5EF4-FFF2-40B4-BE49-F238E27FC236}">
+                <a16:creationId xmlns:a16="http://schemas.microsoft.com/office/drawing/2014/main" id="{F9552844-7714-2AAA-2EB9-E4D820BF3A71}"/>
+              </a:ext>
+            </a:extLst>
+          </p:cNvPr>
+          <p:cNvSpPr txBox="1">
+            <a:spLocks/>
+          </p:cNvSpPr>
+          <p:nvPr/>
+        </p:nvSpPr>
+        <p:spPr>
+          <a:xfrm>
+            <a:off x="7010400" y="1825625"/>
+            <a:ext cx="5181600" cy="4351338"/>
+          </a:xfrm>
+          <a:prstGeom prst="rect">
+            <a:avLst/>
+          </a:prstGeom>
+        </p:spPr>
+        <p:txBody>
+          <a:bodyPr vert="horz" lIns="91440" tIns="45720" rIns="91440" bIns="45720" rtlCol="0">
+            <a:normAutofit/>
+          </a:bodyPr>
+          <a:lstStyle>
+            <a:lvl1pPr marL="228600" indent="-228600" algn="l" defTabSz="914400" rtl="0" eaLnBrk="1" latinLnBrk="0" hangingPunct="1">
+              <a:lnSpc>
+                <a:spcPct val="90000"/>
+              </a:lnSpc>
+              <a:spcBef>
+                <a:spcPts val="1000"/>
+              </a:spcBef>
+              <a:buFont typeface="Arial" panose="020B0604020202020204" pitchFamily="34" charset="0"/>
+              <a:buChar char="•"/>
+              <a:defRPr sz="2800" kern="1200">
+                <a:solidFill>
+                  <a:schemeClr val="tx1"/>
+                </a:solidFill>
+                <a:latin typeface="+mn-lt"/>
+                <a:ea typeface="+mn-ea"/>
+                <a:cs typeface="+mn-cs"/>
+              </a:defRPr>
+            </a:lvl1pPr>
+            <a:lvl2pPr marL="685800" indent="-228600" algn="l" defTabSz="914400" rtl="0" eaLnBrk="1" latinLnBrk="0" hangingPunct="1">
+              <a:lnSpc>
+                <a:spcPct val="90000"/>
+              </a:lnSpc>
+              <a:spcBef>
+                <a:spcPts val="500"/>
+              </a:spcBef>
+              <a:buFont typeface="Arial" panose="020B0604020202020204" pitchFamily="34" charset="0"/>
+              <a:buChar char="•"/>
+              <a:defRPr sz="2400" kern="1200">
+                <a:solidFill>
+                  <a:schemeClr val="tx1"/>
+                </a:solidFill>
+                <a:latin typeface="+mn-lt"/>
+                <a:ea typeface="+mn-ea"/>
+                <a:cs typeface="+mn-cs"/>
+              </a:defRPr>
+            </a:lvl2pPr>
+            <a:lvl3pPr marL="1143000" indent="-228600" algn="l" defTabSz="914400" rtl="0" eaLnBrk="1" latinLnBrk="0" hangingPunct="1">
+              <a:lnSpc>
+                <a:spcPct val="90000"/>
+              </a:lnSpc>
+              <a:spcBef>
+                <a:spcPts val="500"/>
+              </a:spcBef>
+              <a:buFont typeface="Arial" panose="020B0604020202020204" pitchFamily="34" charset="0"/>
+              <a:buChar char="•"/>
+              <a:defRPr sz="2000" kern="1200">
+                <a:solidFill>
+                  <a:schemeClr val="tx1"/>
+                </a:solidFill>
+                <a:latin typeface="+mn-lt"/>
+                <a:ea typeface="+mn-ea"/>
+                <a:cs typeface="+mn-cs"/>
+              </a:defRPr>
+            </a:lvl3pPr>
+            <a:lvl4pPr marL="1600200" indent="-228600" algn="l" defTabSz="914400" rtl="0" eaLnBrk="1" latinLnBrk="0" hangingPunct="1">
+              <a:lnSpc>
+                <a:spcPct val="90000"/>
+              </a:lnSpc>
+              <a:spcBef>
+                <a:spcPts val="500"/>
+              </a:spcBef>
+              <a:buFont typeface="Arial" panose="020B0604020202020204" pitchFamily="34" charset="0"/>
+              <a:buChar char="•"/>
+              <a:defRPr sz="1800" kern="1200">
+                <a:solidFill>
+                  <a:schemeClr val="tx1"/>
+                </a:solidFill>
+                <a:latin typeface="+mn-lt"/>
+                <a:ea typeface="+mn-ea"/>
+                <a:cs typeface="+mn-cs"/>
+              </a:defRPr>
+            </a:lvl4pPr>
+            <a:lvl5pPr marL="2057400" indent="-228600" algn="l" defTabSz="914400" rtl="0" eaLnBrk="1" latinLnBrk="0" hangingPunct="1">
+              <a:lnSpc>
+                <a:spcPct val="90000"/>
+              </a:lnSpc>
+              <a:spcBef>
+                <a:spcPts val="500"/>
+              </a:spcBef>
+              <a:buFont typeface="Arial" panose="020B0604020202020204" pitchFamily="34" charset="0"/>
+              <a:buChar char="•"/>
+              <a:defRPr sz="1800" kern="1200">
+                <a:solidFill>
+                  <a:schemeClr val="tx1"/>
+                </a:solidFill>
+                <a:latin typeface="+mn-lt"/>
+                <a:ea typeface="+mn-ea"/>
+                <a:cs typeface="+mn-cs"/>
+              </a:defRPr>
+            </a:lvl5pPr>
+            <a:lvl6pPr marL="2514600" indent="-228600" algn="l" defTabSz="914400" rtl="0" eaLnBrk="1" latinLnBrk="0" hangingPunct="1">
+              <a:lnSpc>
+                <a:spcPct val="90000"/>
+              </a:lnSpc>
+              <a:spcBef>
+                <a:spcPts val="500"/>
+              </a:spcBef>
+              <a:buFont typeface="Arial" panose="020B0604020202020204" pitchFamily="34" charset="0"/>
+              <a:buChar char="•"/>
+              <a:defRPr sz="1800" kern="1200">
+                <a:solidFill>
+                  <a:schemeClr val="tx1"/>
+                </a:solidFill>
+                <a:latin typeface="+mn-lt"/>
+                <a:ea typeface="+mn-ea"/>
+                <a:cs typeface="+mn-cs"/>
+              </a:defRPr>
+            </a:lvl6pPr>
+            <a:lvl7pPr marL="2971800" indent="-228600" algn="l" defTabSz="914400" rtl="0" eaLnBrk="1" latinLnBrk="0" hangingPunct="1">
+              <a:lnSpc>
+                <a:spcPct val="90000"/>
+              </a:lnSpc>
+              <a:spcBef>
+                <a:spcPts val="500"/>
+              </a:spcBef>
+              <a:buFont typeface="Arial" panose="020B0604020202020204" pitchFamily="34" charset="0"/>
+              <a:buChar char="•"/>
+              <a:defRPr sz="1800" kern="1200">
+                <a:solidFill>
+                  <a:schemeClr val="tx1"/>
+                </a:solidFill>
+                <a:latin typeface="+mn-lt"/>
+                <a:ea typeface="+mn-ea"/>
+                <a:cs typeface="+mn-cs"/>
+              </a:defRPr>
+            </a:lvl7pPr>
+            <a:lvl8pPr marL="3429000" indent="-228600" algn="l" defTabSz="914400" rtl="0" eaLnBrk="1" latinLnBrk="0" hangingPunct="1">
+              <a:lnSpc>
+                <a:spcPct val="90000"/>
+              </a:lnSpc>
+              <a:spcBef>
+                <a:spcPts val="500"/>
+              </a:spcBef>
+              <a:buFont typeface="Arial" panose="020B0604020202020204" pitchFamily="34" charset="0"/>
+              <a:buChar char="•"/>
+              <a:defRPr sz="1800" kern="1200">
+                <a:solidFill>
+                  <a:schemeClr val="tx1"/>
+                </a:solidFill>
+                <a:latin typeface="+mn-lt"/>
+                <a:ea typeface="+mn-ea"/>
+                <a:cs typeface="+mn-cs"/>
+              </a:defRPr>
+            </a:lvl8pPr>
+            <a:lvl9pPr marL="3886200" indent="-228600" algn="l" defTabSz="914400" rtl="0" eaLnBrk="1" latinLnBrk="0" hangingPunct="1">
+              <a:lnSpc>
+                <a:spcPct val="90000"/>
+              </a:lnSpc>
+              <a:spcBef>
+                <a:spcPts val="500"/>
+              </a:spcBef>
+              <a:buFont typeface="Arial" panose="020B0604020202020204" pitchFamily="34" charset="0"/>
+              <a:buChar char="•"/>
+              <a:defRPr sz="1800" kern="1200">
+                <a:solidFill>
+                  <a:schemeClr val="tx1"/>
+                </a:solidFill>
+                <a:latin typeface="+mn-lt"/>
+                <a:ea typeface="+mn-ea"/>
+                <a:cs typeface="+mn-cs"/>
+              </a:defRPr>
+            </a:lvl9pPr>
+          </a:lstStyle>
+          <a:p>
+            <a:pPr marL="0" indent="0">
+              <a:buFont typeface="Arial" panose="020B0604020202020204" pitchFamily="34" charset="0"/>
+              <a:buNone/>
+            </a:pPr>
+            <a:r>
+              <a:rPr lang="zh-CN" altLang="en-US" dirty="0"/>
+              <a:t>固定：</a:t>
+            </a:r>
+            <a:endParaRPr lang="en-US" altLang="zh-CN" dirty="0"/>
+          </a:p>
+          <a:p>
+            <a:r>
+              <a:rPr lang="zh-CN" altLang="en-US" dirty="0"/>
+              <a:t>扎带捆扎（拷打机械留孔位）</a:t>
+            </a:r>
+            <a:endParaRPr lang="en-US" altLang="zh-CN" dirty="0"/>
+          </a:p>
+          <a:p>
+            <a:r>
+              <a:rPr lang="zh-CN" altLang="en-US" dirty="0"/>
+              <a:t>接口打热熔胶</a:t>
+            </a:r>
+            <a:endParaRPr lang="en-US" altLang="zh-CN" dirty="0"/>
+          </a:p>
+          <a:p>
+            <a:r>
+              <a:rPr lang="zh-CN" altLang="en-US" dirty="0"/>
+              <a:t>近端再次固定，避免线束由于惯性拉扯接口</a:t>
+            </a:r>
+            <a:endParaRPr lang="en-US" altLang="zh-CN" dirty="0"/>
+          </a:p>
+        </p:txBody>
+      </p:sp>
+      <p:pic>
+        <p:nvPicPr>
+          <p:cNvPr id="7" name="图片 6">
+            <a:extLst>
+              <a:ext uri="{FF2B5EF4-FFF2-40B4-BE49-F238E27FC236}">
+                <a16:creationId xmlns:a16="http://schemas.microsoft.com/office/drawing/2014/main" id="{B0A8D7EE-ACE7-F8AF-3831-FFF98B414070}"/>
+              </a:ext>
+            </a:extLst>
+          </p:cNvPr>
+          <p:cNvPicPr>
+            <a:picLocks noChangeAspect="1"/>
+          </p:cNvPicPr>
+          <p:nvPr/>
+        </p:nvPicPr>
+        <p:blipFill>
+          <a:blip r:embed="rId2">
+            <a:extLst>
+              <a:ext uri="{28A0092B-C50C-407E-A947-70E740481C1C}">
+                <a14:useLocalDpi xmlns:a14="http://schemas.microsoft.com/office/drawing/2010/main" val="0"/>
+              </a:ext>
+            </a:extLst>
+          </a:blip>
+          <a:stretch>
+            <a:fillRect/>
+          </a:stretch>
+        </p:blipFill>
+        <p:spPr>
+          <a:xfrm>
+            <a:off x="2933700" y="4346544"/>
+            <a:ext cx="6172200" cy="1231296"/>
+          </a:xfrm>
+          <a:prstGeom prst="rect">
+            <a:avLst/>
+          </a:prstGeom>
+        </p:spPr>
+      </p:pic>
+    </p:spTree>
+    <p:extLst>
+      <p:ext uri="{BB962C8B-B14F-4D97-AF65-F5344CB8AC3E}">
+        <p14:creationId xmlns:p14="http://schemas.microsoft.com/office/powerpoint/2010/main" val="3564265212"/>
+      </p:ext>
+    </p:extLst>
+  </p:cSld>
+  <p:clrMapOvr>
+    <a:masterClrMapping/>
+  </p:clrMapOvr>
+  <p:timing>
+    <p:tnLst>
+      <p:par>
+        <p:cTn id="1" dur="indefinite" restart="never" nodeType="tmRoot">
+          <p:childTnLst>
+            <p:seq concurrent="1" nextAc="seek">
+              <p:cTn id="2" dur="indefinite" nodeType="mainSeq">
+                <p:childTnLst>
+                  <p:par>
+                    <p:cTn id="3" fill="hold">
+                      <p:stCondLst>
+                        <p:cond delay="indefinite"/>
+                      </p:stCondLst>
+                      <p:childTnLst>
+                        <p:par>
+                          <p:cTn id="4" fill="hold">
+                            <p:stCondLst>
+                              <p:cond delay="0"/>
+                            </p:stCondLst>
+                            <p:childTnLst>
+                              <p:par>
+                                <p:cTn id="5" presetID="1" presetClass="entr" presetSubtype="0" fill="hold" nodeType="clickEffect">
+                                  <p:stCondLst>
+                                    <p:cond delay="0"/>
+                                  </p:stCondLst>
+                                  <p:childTnLst>
+                                    <p:set>
+                                      <p:cBhvr>
+                                        <p:cTn id="6" dur="1" fill="hold">
+                                          <p:stCondLst>
+                                            <p:cond delay="0"/>
+                                          </p:stCondLst>
+                                        </p:cTn>
+                                        <p:tgtEl>
+                                          <p:spTgt spid="7"/>
+                                        </p:tgtEl>
+                                        <p:attrNameLst>
+                                          <p:attrName>style.visibility</p:attrName>
+                                        </p:attrNameLst>
+                                      </p:cBhvr>
+                                      <p:to>
+                                        <p:strVal val="visible"/>
+                                      </p:to>
+                                    </p:set>
+                                  </p:childTnLst>
+                                </p:cTn>
+                              </p:par>
+                            </p:childTnLst>
+                          </p:cTn>
+                        </p:par>
+                      </p:childTnLst>
+                    </p:cTn>
+                  </p:par>
+                </p:childTnLst>
+              </p:cTn>
+              <p:prevCondLst>
+                <p:cond evt="onPrev" delay="0">
+                  <p:tgtEl>
+                    <p:sldTgt/>
+                  </p:tgtEl>
+                </p:cond>
+              </p:prevCondLst>
+              <p:nextCondLst>
+                <p:cond evt="onNext" delay="0">
+                  <p:tgtEl>
+                    <p:sldTgt/>
+                  </p:tgtEl>
+                </p:cond>
+              </p:nextCondLst>
+            </p:seq>
+          </p:childTnLst>
+        </p:cTn>
+      </p:par>
+    </p:tnLst>
+  </p:timing>
+</p:sld>
+</file>
+
+<file path=ppt/slides/slide2.xml><?xml version="1.0" encoding="utf-8"?>
+<p:sld xmlns:a="http://schemas.openxmlformats.org/drawingml/2006/main" xmlns:r="http://schemas.openxmlformats.org/officeDocument/2006/relationships" xmlns:p="http://schemas.openxmlformats.org/presentationml/2006/main">
+  <p:cSld>
+    <p:spTree>
+      <p:nvGrpSpPr>
+        <p:cNvPr id="1" name=""/>
+        <p:cNvGrpSpPr/>
+        <p:nvPr/>
+      </p:nvGrpSpPr>
+      <p:grpSpPr>
+        <a:xfrm>
+          <a:off x="0" y="0"/>
+          <a:ext cx="0" cy="0"/>
+          <a:chOff x="0" y="0"/>
+          <a:chExt cx="0" cy="0"/>
+        </a:xfrm>
+      </p:grpSpPr>
+      <p:sp>
+        <p:nvSpPr>
+          <p:cNvPr id="2" name="标题 1">
+            <a:extLst>
+              <a:ext uri="{FF2B5EF4-FFF2-40B4-BE49-F238E27FC236}">
+                <a16:creationId xmlns:a16="http://schemas.microsoft.com/office/drawing/2014/main" id="{087F3FA1-7899-0930-6482-286E8C1AC973}"/>
+              </a:ext>
+            </a:extLst>
+          </p:cNvPr>
+          <p:cNvSpPr>
+            <a:spLocks noGrp="1"/>
+          </p:cNvSpPr>
+          <p:nvPr>
+            <p:ph type="title"/>
+          </p:nvPr>
+        </p:nvSpPr>
+        <p:spPr/>
+        <p:txBody>
+          <a:bodyPr/>
+          <a:lstStyle/>
+          <a:p>
+            <a:r>
+              <a:rPr lang="zh-CN" altLang="en-US" dirty="0"/>
+              <a:t>常见通讯协议与对应接线要求</a:t>
+            </a:r>
+            <a:endParaRPr lang="zh-SG" altLang="en-US" dirty="0"/>
+          </a:p>
+        </p:txBody>
+      </p:sp>
+      <p:sp>
+        <p:nvSpPr>
+          <p:cNvPr id="3" name="内容占位符 2">
+            <a:extLst>
+              <a:ext uri="{FF2B5EF4-FFF2-40B4-BE49-F238E27FC236}">
+                <a16:creationId xmlns:a16="http://schemas.microsoft.com/office/drawing/2014/main" id="{C5BF3B13-6CD0-791E-04F7-B51BB527D9B1}"/>
+              </a:ext>
+            </a:extLst>
+          </p:cNvPr>
+          <p:cNvSpPr>
+            <a:spLocks noGrp="1"/>
+          </p:cNvSpPr>
+          <p:nvPr>
+            <p:ph sz="half" idx="1"/>
+          </p:nvPr>
+        </p:nvSpPr>
+        <p:spPr>
+          <a:xfrm>
+            <a:off x="838200" y="1690688"/>
+            <a:ext cx="5181600" cy="5167311"/>
+          </a:xfrm>
+        </p:spPr>
+        <p:txBody>
+          <a:bodyPr>
+            <a:normAutofit fontScale="92500" lnSpcReduction="10000"/>
+          </a:bodyPr>
+          <a:lstStyle/>
+          <a:p>
+            <a:pPr marL="0" indent="0">
+              <a:buNone/>
+            </a:pPr>
+            <a:r>
+              <a:rPr lang="en-US" altLang="zh-CN" dirty="0"/>
+              <a:t>CAN</a:t>
+            </a:r>
+          </a:p>
+          <a:p>
+            <a:r>
+              <a:rPr lang="en-US" altLang="zh-SG" dirty="0"/>
+              <a:t>1~5</a:t>
+            </a:r>
+            <a:r>
+              <a:rPr lang="en-US" altLang="zh-CN" dirty="0"/>
+              <a:t>M</a:t>
+            </a:r>
+          </a:p>
+          <a:p>
+            <a:r>
+              <a:rPr lang="en-US" altLang="zh-SG" dirty="0"/>
+              <a:t>2</a:t>
+            </a:r>
+            <a:r>
+              <a:rPr lang="zh-CN" altLang="en-US" dirty="0"/>
+              <a:t>根差分线（</a:t>
+            </a:r>
+            <a:r>
+              <a:rPr lang="en-US" altLang="zh-CN" dirty="0"/>
+              <a:t>H</a:t>
+            </a:r>
+            <a:r>
+              <a:rPr lang="zh-CN" altLang="en-US" dirty="0"/>
+              <a:t>、</a:t>
+            </a:r>
+            <a:r>
+              <a:rPr lang="en-US" altLang="zh-CN" dirty="0"/>
+              <a:t>L</a:t>
+            </a:r>
+            <a:r>
+              <a:rPr lang="zh-CN" altLang="en-US" dirty="0"/>
+              <a:t>）</a:t>
+            </a:r>
+            <a:endParaRPr lang="en-US" altLang="zh-CN" dirty="0"/>
+          </a:p>
+          <a:p>
+            <a:r>
+              <a:rPr lang="en-US" altLang="zh-CN" dirty="0"/>
+              <a:t>H</a:t>
+            </a:r>
+            <a:r>
+              <a:rPr lang="zh-CN" altLang="en-US" dirty="0"/>
+              <a:t>连</a:t>
+            </a:r>
+            <a:r>
+              <a:rPr lang="en-US" altLang="zh-CN" dirty="0"/>
+              <a:t>H</a:t>
+            </a:r>
+            <a:r>
+              <a:rPr lang="zh-CN" altLang="en-US" dirty="0"/>
+              <a:t>，</a:t>
+            </a:r>
+            <a:r>
+              <a:rPr lang="en-US" altLang="zh-CN" dirty="0"/>
+              <a:t>L</a:t>
+            </a:r>
+            <a:r>
+              <a:rPr lang="zh-CN" altLang="en-US" dirty="0"/>
+              <a:t>连</a:t>
+            </a:r>
+            <a:r>
+              <a:rPr lang="en-US" altLang="zh-CN" dirty="0"/>
+              <a:t>L</a:t>
+            </a:r>
+          </a:p>
+          <a:p>
+            <a:pPr marL="0" indent="0">
+              <a:buNone/>
+            </a:pPr>
+            <a:r>
+              <a:rPr lang="en-US" altLang="zh-CN" dirty="0"/>
+              <a:t>UART</a:t>
+            </a:r>
+          </a:p>
+          <a:p>
+            <a:r>
+              <a:rPr lang="en-US" altLang="zh-SG" dirty="0"/>
+              <a:t>115200</a:t>
+            </a:r>
+            <a:r>
+              <a:rPr lang="zh-CN" altLang="en-US" dirty="0"/>
+              <a:t>，</a:t>
+            </a:r>
+            <a:r>
+              <a:rPr lang="en-US" altLang="zh-CN" dirty="0"/>
+              <a:t>921600</a:t>
+            </a:r>
+            <a:r>
+              <a:rPr lang="zh-CN" altLang="en-US" dirty="0"/>
+              <a:t>等</a:t>
+            </a:r>
+            <a:endParaRPr lang="en-US" altLang="zh-CN" dirty="0"/>
+          </a:p>
+          <a:p>
+            <a:r>
+              <a:rPr lang="zh-CN" altLang="en-US" dirty="0"/>
+              <a:t>一般</a:t>
+            </a:r>
+            <a:r>
+              <a:rPr lang="en-US" altLang="zh-CN" dirty="0"/>
+              <a:t>3</a:t>
+            </a:r>
+            <a:r>
+              <a:rPr lang="zh-CN" altLang="en-US" dirty="0"/>
+              <a:t>根线（</a:t>
+            </a:r>
+            <a:r>
+              <a:rPr lang="en-US" altLang="zh-CN" dirty="0"/>
+              <a:t>Tx</a:t>
+            </a:r>
+            <a:r>
+              <a:rPr lang="zh-CN" altLang="en-US" dirty="0"/>
+              <a:t>，</a:t>
+            </a:r>
+            <a:r>
+              <a:rPr lang="en-US" altLang="zh-CN" dirty="0"/>
+              <a:t>Rx</a:t>
+            </a:r>
+            <a:r>
+              <a:rPr lang="zh-CN" altLang="en-US" dirty="0"/>
+              <a:t>，共地）</a:t>
+            </a:r>
+            <a:endParaRPr lang="en-US" altLang="zh-CN" dirty="0"/>
+          </a:p>
+          <a:p>
+            <a:r>
+              <a:rPr lang="en-US" altLang="zh-CN" dirty="0"/>
+              <a:t>Tx</a:t>
+            </a:r>
+            <a:r>
+              <a:rPr lang="zh-CN" altLang="en-US" dirty="0"/>
+              <a:t>对</a:t>
+            </a:r>
+            <a:r>
+              <a:rPr lang="en-US" altLang="zh-CN" dirty="0"/>
+              <a:t>Rx</a:t>
+            </a:r>
+            <a:r>
+              <a:rPr lang="zh-CN" altLang="en-US" dirty="0"/>
+              <a:t>，地连地</a:t>
+            </a:r>
+            <a:endParaRPr lang="en-US" altLang="zh-CN" dirty="0"/>
+          </a:p>
+          <a:p>
+            <a:pPr marL="0" indent="0">
+              <a:buNone/>
+            </a:pPr>
+            <a:r>
+              <a:rPr lang="en-US" altLang="zh-SG" dirty="0"/>
+              <a:t>485</a:t>
+            </a:r>
+          </a:p>
+          <a:p>
+            <a:r>
+              <a:rPr lang="en-US" altLang="zh-SG" dirty="0"/>
+              <a:t>2</a:t>
+            </a:r>
+            <a:r>
+              <a:rPr lang="zh-CN" altLang="en-US" dirty="0"/>
+              <a:t>根差分线（</a:t>
+            </a:r>
+            <a:r>
+              <a:rPr lang="en-US" altLang="zh-CN" dirty="0"/>
+              <a:t>A</a:t>
+            </a:r>
+            <a:r>
+              <a:rPr lang="zh-CN" altLang="en-US" dirty="0"/>
+              <a:t>、</a:t>
+            </a:r>
+            <a:r>
+              <a:rPr lang="en-US" altLang="zh-CN" dirty="0"/>
+              <a:t>B</a:t>
+            </a:r>
+            <a:r>
+              <a:rPr lang="zh-CN" altLang="en-US" dirty="0"/>
+              <a:t>）</a:t>
+            </a:r>
+            <a:endParaRPr lang="en-US" altLang="zh-CN" dirty="0"/>
+          </a:p>
+          <a:p>
+            <a:r>
+              <a:rPr lang="en-US" altLang="zh-SG" dirty="0"/>
+              <a:t>A</a:t>
+            </a:r>
+            <a:r>
+              <a:rPr lang="zh-CN" altLang="en-US" dirty="0"/>
+              <a:t>连</a:t>
+            </a:r>
+            <a:r>
+              <a:rPr lang="en-US" altLang="zh-SG" dirty="0"/>
+              <a:t>A</a:t>
+            </a:r>
+            <a:r>
+              <a:rPr lang="zh-CN" altLang="en-US" dirty="0"/>
+              <a:t>，</a:t>
+            </a:r>
+            <a:r>
+              <a:rPr lang="en-US" altLang="zh-SG" dirty="0"/>
+              <a:t>B</a:t>
+            </a:r>
+            <a:r>
+              <a:rPr lang="zh-CN" altLang="en-US" dirty="0"/>
+              <a:t>连</a:t>
+            </a:r>
+            <a:r>
+              <a:rPr lang="en-US" altLang="zh-SG" dirty="0"/>
+              <a:t>B</a:t>
+            </a:r>
+            <a:endParaRPr lang="zh-SG" altLang="en-US" dirty="0"/>
+          </a:p>
+        </p:txBody>
+      </p:sp>
+      <p:sp>
+        <p:nvSpPr>
+          <p:cNvPr id="4" name="内容占位符 3">
+            <a:extLst>
+              <a:ext uri="{FF2B5EF4-FFF2-40B4-BE49-F238E27FC236}">
+                <a16:creationId xmlns:a16="http://schemas.microsoft.com/office/drawing/2014/main" id="{34924E5E-5F10-CE72-673F-709074FA69AA}"/>
+              </a:ext>
+            </a:extLst>
+          </p:cNvPr>
+          <p:cNvSpPr>
+            <a:spLocks noGrp="1"/>
+          </p:cNvSpPr>
+          <p:nvPr>
+            <p:ph sz="half" idx="2"/>
+          </p:nvPr>
+        </p:nvSpPr>
+        <p:spPr>
+          <a:xfrm>
+            <a:off x="6172200" y="1690688"/>
+            <a:ext cx="5181600" cy="5167311"/>
+          </a:xfrm>
+        </p:spPr>
+        <p:txBody>
+          <a:bodyPr>
+            <a:normAutofit fontScale="92500" lnSpcReduction="10000"/>
+          </a:bodyPr>
+          <a:lstStyle/>
+          <a:p>
+            <a:r>
+              <a:rPr lang="zh-CN" altLang="en-US" dirty="0"/>
+              <a:t>注意线序，以手册为准</a:t>
+            </a:r>
+            <a:endParaRPr lang="en-US" altLang="zh-CN" dirty="0"/>
+          </a:p>
+          <a:p>
+            <a:pPr lvl="1"/>
+            <a:r>
+              <a:rPr lang="en-US" altLang="zh-CN" dirty="0"/>
+              <a:t>CAN</a:t>
+            </a:r>
+            <a:r>
+              <a:rPr lang="zh-CN" altLang="en-US" dirty="0"/>
+              <a:t>接口：左</a:t>
+            </a:r>
+            <a:r>
+              <a:rPr lang="en-US" altLang="zh-CN" dirty="0"/>
+              <a:t>H</a:t>
+            </a:r>
+            <a:r>
+              <a:rPr lang="zh-CN" altLang="en-US" dirty="0"/>
+              <a:t>右</a:t>
+            </a:r>
+            <a:r>
+              <a:rPr lang="en-US" altLang="zh-CN" dirty="0"/>
+              <a:t>L</a:t>
+            </a:r>
+            <a:r>
+              <a:rPr lang="zh-CN" altLang="en-US" dirty="0"/>
+              <a:t>或左</a:t>
+            </a:r>
+            <a:r>
+              <a:rPr lang="en-US" altLang="zh-CN" dirty="0"/>
+              <a:t>L</a:t>
+            </a:r>
+            <a:r>
+              <a:rPr lang="zh-CN" altLang="en-US" dirty="0"/>
+              <a:t>右</a:t>
+            </a:r>
+            <a:r>
+              <a:rPr lang="en-US" altLang="zh-CN" dirty="0"/>
+              <a:t>H</a:t>
+            </a:r>
+            <a:r>
+              <a:rPr lang="zh-CN" altLang="en-US" dirty="0"/>
+              <a:t>？</a:t>
+            </a:r>
+            <a:endParaRPr lang="en-US" altLang="zh-CN" dirty="0"/>
+          </a:p>
+          <a:p>
+            <a:pPr lvl="1"/>
+            <a:r>
+              <a:rPr lang="zh-CN" altLang="en-US" dirty="0"/>
+              <a:t>有没有电源线？</a:t>
+            </a:r>
+            <a:endParaRPr lang="zh-SG" altLang="en-US" dirty="0"/>
+          </a:p>
+        </p:txBody>
+      </p:sp>
+      <p:pic>
+        <p:nvPicPr>
+          <p:cNvPr id="6" name="图片 5">
+            <a:extLst>
+              <a:ext uri="{FF2B5EF4-FFF2-40B4-BE49-F238E27FC236}">
+                <a16:creationId xmlns:a16="http://schemas.microsoft.com/office/drawing/2014/main" id="{48839094-8BDD-9A58-17EB-8A46622FC8A3}"/>
+              </a:ext>
+            </a:extLst>
+          </p:cNvPr>
+          <p:cNvPicPr>
+            <a:picLocks noChangeAspect="1"/>
+          </p:cNvPicPr>
+          <p:nvPr/>
+        </p:nvPicPr>
+        <p:blipFill>
+          <a:blip r:embed="rId2"/>
+          <a:stretch>
+            <a:fillRect/>
+          </a:stretch>
+        </p:blipFill>
+        <p:spPr>
+          <a:xfrm>
+            <a:off x="5914266" y="2766959"/>
+            <a:ext cx="5439534" cy="1600423"/>
+          </a:xfrm>
+          <a:prstGeom prst="rect">
+            <a:avLst/>
+          </a:prstGeom>
+        </p:spPr>
+      </p:pic>
+      <p:pic>
+        <p:nvPicPr>
+          <p:cNvPr id="8" name="图片 7">
+            <a:extLst>
+              <a:ext uri="{FF2B5EF4-FFF2-40B4-BE49-F238E27FC236}">
+                <a16:creationId xmlns:a16="http://schemas.microsoft.com/office/drawing/2014/main" id="{755B69F4-93DD-E787-E094-3268BE93A1B3}"/>
+              </a:ext>
+            </a:extLst>
+          </p:cNvPr>
+          <p:cNvPicPr>
+            <a:picLocks noChangeAspect="1"/>
+          </p:cNvPicPr>
+          <p:nvPr/>
+        </p:nvPicPr>
+        <p:blipFill>
+          <a:blip r:embed="rId3"/>
+          <a:stretch>
+            <a:fillRect/>
+          </a:stretch>
+        </p:blipFill>
+        <p:spPr>
+          <a:xfrm>
+            <a:off x="5855268" y="4367382"/>
+            <a:ext cx="6336732" cy="2486221"/>
+          </a:xfrm>
+          <a:prstGeom prst="rect">
+            <a:avLst/>
+          </a:prstGeom>
+        </p:spPr>
+      </p:pic>
+    </p:spTree>
+    <p:extLst>
+      <p:ext uri="{BB962C8B-B14F-4D97-AF65-F5344CB8AC3E}">
+        <p14:creationId xmlns:p14="http://schemas.microsoft.com/office/powerpoint/2010/main" val="634634195"/>
+      </p:ext>
+    </p:extLst>
+  </p:cSld>
+  <p:clrMapOvr>
+    <a:masterClrMapping/>
+  </p:clrMapOvr>
+</p:sld>
+</file>
+
+<file path=ppt/slides/slide3.xml><?xml version="1.0" encoding="utf-8"?>
+<p:sld xmlns:a="http://schemas.openxmlformats.org/drawingml/2006/main" xmlns:r="http://schemas.openxmlformats.org/officeDocument/2006/relationships" xmlns:p="http://schemas.openxmlformats.org/presentationml/2006/main">
+  <p:cSld>
+    <p:spTree>
+      <p:nvGrpSpPr>
+        <p:cNvPr id="1" name=""/>
+        <p:cNvGrpSpPr/>
+        <p:nvPr/>
+      </p:nvGrpSpPr>
+      <p:grpSpPr>
+        <a:xfrm>
+          <a:off x="0" y="0"/>
+          <a:ext cx="0" cy="0"/>
+          <a:chOff x="0" y="0"/>
+          <a:chExt cx="0" cy="0"/>
+        </a:xfrm>
+      </p:grpSpPr>
+      <p:sp>
+        <p:nvSpPr>
+          <p:cNvPr id="2" name="标题 1">
+            <a:extLst>
+              <a:ext uri="{FF2B5EF4-FFF2-40B4-BE49-F238E27FC236}">
+                <a16:creationId xmlns:a16="http://schemas.microsoft.com/office/drawing/2014/main" id="{DA95E2C5-DF32-13E8-9FF3-91C9F33B87B1}"/>
+              </a:ext>
+            </a:extLst>
+          </p:cNvPr>
+          <p:cNvSpPr>
+            <a:spLocks noGrp="1"/>
+          </p:cNvSpPr>
+          <p:nvPr>
+            <p:ph type="title"/>
+          </p:nvPr>
+        </p:nvSpPr>
+        <p:spPr/>
+        <p:txBody>
+          <a:bodyPr/>
+          <a:lstStyle/>
+          <a:p>
+            <a:r>
+              <a:rPr lang="zh-CN" altLang="en-US" dirty="0"/>
+              <a:t>常用电机</a:t>
+            </a:r>
+            <a:endParaRPr lang="zh-SG" altLang="en-US" dirty="0"/>
+          </a:p>
+        </p:txBody>
+      </p:sp>
+      <p:sp>
+        <p:nvSpPr>
+          <p:cNvPr id="3" name="内容占位符 2">
+            <a:extLst>
+              <a:ext uri="{FF2B5EF4-FFF2-40B4-BE49-F238E27FC236}">
+                <a16:creationId xmlns:a16="http://schemas.microsoft.com/office/drawing/2014/main" id="{75BDF090-144B-B729-3979-91C4E69D3F57}"/>
+              </a:ext>
+            </a:extLst>
+          </p:cNvPr>
+          <p:cNvSpPr>
+            <a:spLocks noGrp="1"/>
+          </p:cNvSpPr>
+          <p:nvPr>
+            <p:ph sz="half" idx="1"/>
+          </p:nvPr>
+        </p:nvSpPr>
+        <p:spPr>
+          <a:xfrm>
+            <a:off x="838200" y="1825625"/>
+            <a:ext cx="5181600" cy="4351338"/>
+          </a:xfrm>
+        </p:spPr>
+        <p:txBody>
+          <a:bodyPr>
+            <a:normAutofit/>
+          </a:bodyPr>
+          <a:lstStyle/>
+          <a:p>
+            <a:pPr marL="0" indent="0">
+              <a:buNone/>
+            </a:pPr>
+            <a:r>
+              <a:rPr lang="zh-CN" altLang="en-US" dirty="0"/>
+              <a:t>大疆电机：</a:t>
+            </a:r>
+            <a:endParaRPr lang="en-US" altLang="zh-CN" dirty="0"/>
+          </a:p>
+          <a:p>
+            <a:r>
+              <a:rPr lang="en-US" altLang="zh-CN" dirty="0"/>
+              <a:t>C620+3508</a:t>
+            </a:r>
+          </a:p>
+          <a:p>
+            <a:r>
+              <a:rPr lang="en-US" altLang="zh-CN" dirty="0"/>
+              <a:t>C610+2006</a:t>
+            </a:r>
+          </a:p>
+          <a:p>
+            <a:r>
+              <a:rPr lang="en-US" altLang="zh-SG" dirty="0"/>
+              <a:t>6020</a:t>
+            </a:r>
+          </a:p>
+          <a:p>
+            <a:pPr marL="0" indent="0">
+              <a:buNone/>
+            </a:pPr>
+            <a:r>
+              <a:rPr lang="zh-CN" altLang="en-US" dirty="0"/>
+              <a:t>使用</a:t>
+            </a:r>
+            <a:r>
+              <a:rPr lang="en-US" altLang="zh-CN" dirty="0"/>
+              <a:t>XT30+GH1.25</a:t>
+            </a:r>
+            <a:endParaRPr lang="zh-SG" altLang="en-US" dirty="0"/>
+          </a:p>
+        </p:txBody>
+      </p:sp>
+      <p:sp>
+        <p:nvSpPr>
+          <p:cNvPr id="4" name="内容占位符 3">
+            <a:extLst>
+              <a:ext uri="{FF2B5EF4-FFF2-40B4-BE49-F238E27FC236}">
+                <a16:creationId xmlns:a16="http://schemas.microsoft.com/office/drawing/2014/main" id="{F4D59F0C-FB9A-F4AD-8C84-C37956CF8E3F}"/>
+              </a:ext>
+            </a:extLst>
+          </p:cNvPr>
+          <p:cNvSpPr>
+            <a:spLocks noGrp="1"/>
+          </p:cNvSpPr>
+          <p:nvPr>
+            <p:ph sz="half" idx="2"/>
+          </p:nvPr>
+        </p:nvSpPr>
+        <p:spPr>
+          <a:xfrm>
+            <a:off x="6172200" y="1825625"/>
+            <a:ext cx="5181600" cy="4351338"/>
+          </a:xfrm>
+        </p:spPr>
+        <p:txBody>
+          <a:bodyPr>
+            <a:normAutofit/>
+          </a:bodyPr>
+          <a:lstStyle/>
+          <a:p>
+            <a:pPr marL="0" indent="0">
+              <a:buNone/>
+            </a:pPr>
+            <a:r>
+              <a:rPr lang="zh-CN" altLang="en-US" dirty="0"/>
+              <a:t>达妙电机：</a:t>
+            </a:r>
+            <a:endParaRPr lang="en-US" altLang="zh-CN" dirty="0"/>
+          </a:p>
+          <a:p>
+            <a:r>
+              <a:rPr lang="en-US" altLang="zh-SG" dirty="0"/>
+              <a:t>4310</a:t>
+            </a:r>
+          </a:p>
+          <a:p>
+            <a:r>
+              <a:rPr lang="en-US" altLang="zh-SG" dirty="0"/>
+              <a:t>8009</a:t>
+            </a:r>
+          </a:p>
+          <a:p>
+            <a:pPr marL="0" indent="0">
+              <a:buNone/>
+            </a:pPr>
+            <a:r>
+              <a:rPr lang="zh-CN" altLang="en-US" dirty="0"/>
+              <a:t>使用</a:t>
+            </a:r>
+            <a:r>
+              <a:rPr lang="en-US" altLang="zh-CN" dirty="0"/>
+              <a:t>XT30 2+2</a:t>
+            </a:r>
+          </a:p>
+          <a:p>
+            <a:pPr marL="0" indent="0">
+              <a:buNone/>
+            </a:pPr>
+            <a:endParaRPr lang="en-US" altLang="zh-SG" dirty="0"/>
+          </a:p>
+          <a:p>
+            <a:r>
+              <a:rPr lang="en-US" altLang="zh-SG" dirty="0"/>
+              <a:t>3507</a:t>
+            </a:r>
+            <a:endParaRPr lang="en-US" altLang="zh-CN" dirty="0"/>
+          </a:p>
+          <a:p>
+            <a:pPr marL="0" indent="0">
+              <a:buNone/>
+            </a:pPr>
+            <a:r>
+              <a:rPr lang="zh-CN" altLang="en-US" dirty="0"/>
+              <a:t>使用</a:t>
+            </a:r>
+            <a:r>
+              <a:rPr lang="en-US" altLang="zh-CN"/>
+              <a:t>SH1.0</a:t>
+            </a:r>
+            <a:endParaRPr lang="en-US" altLang="zh-SG" dirty="0"/>
+          </a:p>
+        </p:txBody>
+      </p:sp>
+    </p:spTree>
+    <p:extLst>
+      <p:ext uri="{BB962C8B-B14F-4D97-AF65-F5344CB8AC3E}">
+        <p14:creationId xmlns:p14="http://schemas.microsoft.com/office/powerpoint/2010/main" val="3967403093"/>
+      </p:ext>
+    </p:extLst>
+  </p:cSld>
+  <p:clrMapOvr>
+    <a:masterClrMapping/>
+  </p:clrMapOvr>
+</p:sld>
+</file>
+
+<file path=ppt/slides/slide4.xml><?xml version="1.0" encoding="utf-8"?>
+<p:sld xmlns:a="http://schemas.openxmlformats.org/drawingml/2006/main" xmlns:r="http://schemas.openxmlformats.org/officeDocument/2006/relationships" xmlns:p="http://schemas.openxmlformats.org/presentationml/2006/main">
+  <p:cSld>
+    <p:spTree>
+      <p:nvGrpSpPr>
+        <p:cNvPr id="1" name=""/>
+        <p:cNvGrpSpPr/>
+        <p:nvPr/>
+      </p:nvGrpSpPr>
+      <p:grpSpPr>
+        <a:xfrm>
+          <a:off x="0" y="0"/>
+          <a:ext cx="0" cy="0"/>
+          <a:chOff x="0" y="0"/>
+          <a:chExt cx="0" cy="0"/>
+        </a:xfrm>
+      </p:grpSpPr>
+      <p:pic>
+        <p:nvPicPr>
+          <p:cNvPr id="10" name="图片 9">
+            <a:extLst>
+              <a:ext uri="{FF2B5EF4-FFF2-40B4-BE49-F238E27FC236}">
+                <a16:creationId xmlns:a16="http://schemas.microsoft.com/office/drawing/2014/main" id="{6005CEEF-BAF0-44FB-32C7-D496BEF76100}"/>
+              </a:ext>
+            </a:extLst>
+          </p:cNvPr>
+          <p:cNvPicPr>
+            <a:picLocks noChangeAspect="1"/>
+          </p:cNvPicPr>
+          <p:nvPr/>
+        </p:nvPicPr>
+        <p:blipFill>
+          <a:blip r:embed="rId2"/>
+          <a:stretch>
+            <a:fillRect/>
+          </a:stretch>
+        </p:blipFill>
+        <p:spPr>
+          <a:xfrm>
+            <a:off x="1037519" y="509180"/>
+            <a:ext cx="10116962" cy="5839640"/>
+          </a:xfrm>
+          <a:prstGeom prst="rect">
+            <a:avLst/>
+          </a:prstGeom>
+        </p:spPr>
+      </p:pic>
+    </p:spTree>
+    <p:extLst>
+      <p:ext uri="{BB962C8B-B14F-4D97-AF65-F5344CB8AC3E}">
+        <p14:creationId xmlns:p14="http://schemas.microsoft.com/office/powerpoint/2010/main" val="836833322"/>
+      </p:ext>
+    </p:extLst>
+  </p:cSld>
+  <p:clrMapOvr>
+    <a:masterClrMapping/>
+  </p:clrMapOvr>
+</p:sld>
+</file>
+
+<file path=ppt/slides/slide5.xml><?xml version="1.0" encoding="utf-8"?>
+<p:sld xmlns:a="http://schemas.openxmlformats.org/drawingml/2006/main" xmlns:r="http://schemas.openxmlformats.org/officeDocument/2006/relationships" xmlns:p="http://schemas.openxmlformats.org/presentationml/2006/main">
+  <p:cSld>
+    <p:spTree>
+      <p:nvGrpSpPr>
+        <p:cNvPr id="1" name=""/>
+        <p:cNvGrpSpPr/>
+        <p:nvPr/>
+      </p:nvGrpSpPr>
+      <p:grpSpPr>
+        <a:xfrm>
+          <a:off x="0" y="0"/>
+          <a:ext cx="0" cy="0"/>
+          <a:chOff x="0" y="0"/>
+          <a:chExt cx="0" cy="0"/>
+        </a:xfrm>
+      </p:grpSpPr>
+      <p:pic>
+        <p:nvPicPr>
+          <p:cNvPr id="6" name="图片 5">
+            <a:extLst>
+              <a:ext uri="{FF2B5EF4-FFF2-40B4-BE49-F238E27FC236}">
+                <a16:creationId xmlns:a16="http://schemas.microsoft.com/office/drawing/2014/main" id="{32F645F2-BD95-1A3A-7E3F-ED63F4AFEEAE}"/>
+              </a:ext>
+            </a:extLst>
+          </p:cNvPr>
+          <p:cNvPicPr>
+            <a:picLocks noChangeAspect="1"/>
+          </p:cNvPicPr>
+          <p:nvPr/>
+        </p:nvPicPr>
+        <p:blipFill>
+          <a:blip r:embed="rId2"/>
+          <a:stretch>
+            <a:fillRect/>
+          </a:stretch>
+        </p:blipFill>
+        <p:spPr>
+          <a:xfrm>
+            <a:off x="2032371" y="0"/>
+            <a:ext cx="7974857" cy="6858000"/>
+          </a:xfrm>
+          <a:prstGeom prst="rect">
+            <a:avLst/>
+          </a:prstGeom>
+        </p:spPr>
+      </p:pic>
+    </p:spTree>
+    <p:extLst>
+      <p:ext uri="{BB962C8B-B14F-4D97-AF65-F5344CB8AC3E}">
+        <p14:creationId xmlns:p14="http://schemas.microsoft.com/office/powerpoint/2010/main" val="3223343368"/>
+      </p:ext>
+    </p:extLst>
+  </p:cSld>
+  <p:clrMapOvr>
+    <a:masterClrMapping/>
+  </p:clrMapOvr>
+</p:sld>
+</file>
+
+<file path=ppt/slides/slide6.xml><?xml version="1.0" encoding="utf-8"?>
+<p:sld xmlns:a="http://schemas.openxmlformats.org/drawingml/2006/main" xmlns:r="http://schemas.openxmlformats.org/officeDocument/2006/relationships" xmlns:p="http://schemas.openxmlformats.org/presentationml/2006/main">
+  <p:cSld>
+    <p:spTree>
+      <p:nvGrpSpPr>
+        <p:cNvPr id="1" name=""/>
+        <p:cNvGrpSpPr/>
+        <p:nvPr/>
+      </p:nvGrpSpPr>
+      <p:grpSpPr>
+        <a:xfrm>
+          <a:off x="0" y="0"/>
+          <a:ext cx="0" cy="0"/>
+          <a:chOff x="0" y="0"/>
+          <a:chExt cx="0" cy="0"/>
+        </a:xfrm>
+      </p:grpSpPr>
+      <p:sp>
+        <p:nvSpPr>
+          <p:cNvPr id="2" name="标题 1">
+            <a:extLst>
+              <a:ext uri="{FF2B5EF4-FFF2-40B4-BE49-F238E27FC236}">
+                <a16:creationId xmlns:a16="http://schemas.microsoft.com/office/drawing/2014/main" id="{D618B685-027A-8D12-C46C-4A16728ABA6B}"/>
+              </a:ext>
+            </a:extLst>
+          </p:cNvPr>
+          <p:cNvSpPr>
+            <a:spLocks noGrp="1"/>
+          </p:cNvSpPr>
+          <p:nvPr>
+            <p:ph type="title"/>
+          </p:nvPr>
+        </p:nvSpPr>
+        <p:spPr/>
+        <p:txBody>
+          <a:bodyPr/>
+          <a:lstStyle/>
+          <a:p>
+            <a:r>
+              <a:rPr lang="zh-CN" altLang="en-US" dirty="0"/>
+              <a:t>裁判系统接线</a:t>
+            </a:r>
+          </a:p>
+        </p:txBody>
+      </p:sp>
+      <p:sp>
+        <p:nvSpPr>
+          <p:cNvPr id="3" name="内容占位符 2">
+            <a:extLst>
+              <a:ext uri="{FF2B5EF4-FFF2-40B4-BE49-F238E27FC236}">
+                <a16:creationId xmlns:a16="http://schemas.microsoft.com/office/drawing/2014/main" id="{7CBCB741-D387-C5A7-8BAC-9ED5D5249279}"/>
+              </a:ext>
+            </a:extLst>
+          </p:cNvPr>
+          <p:cNvSpPr>
+            <a:spLocks noGrp="1"/>
+          </p:cNvSpPr>
+          <p:nvPr>
+            <p:ph sz="half" idx="1"/>
+          </p:nvPr>
+        </p:nvSpPr>
+        <p:spPr>
+          <a:xfrm>
+            <a:off x="838201" y="1375249"/>
+            <a:ext cx="5181600" cy="4351338"/>
+          </a:xfrm>
+        </p:spPr>
+        <p:txBody>
+          <a:bodyPr/>
+          <a:lstStyle/>
+          <a:p>
+            <a:r>
+              <a:rPr lang="zh-CN" altLang="en-US" dirty="0"/>
+              <a:t>看规则</a:t>
+            </a:r>
+            <a:endParaRPr lang="en-US" altLang="zh-CN" dirty="0"/>
+          </a:p>
+          <a:p>
+            <a:r>
+              <a:rPr lang="zh-CN" altLang="en-US" dirty="0"/>
+              <a:t>看规则</a:t>
+            </a:r>
+            <a:endParaRPr lang="en-US" altLang="zh-CN" dirty="0"/>
+          </a:p>
+          <a:p>
+            <a:r>
+              <a:rPr lang="zh-CN" altLang="en-US" dirty="0"/>
+              <a:t>看规则</a:t>
+            </a:r>
+            <a:endParaRPr lang="en-US" altLang="zh-CN" dirty="0"/>
+          </a:p>
+        </p:txBody>
+      </p:sp>
+      <p:sp>
+        <p:nvSpPr>
+          <p:cNvPr id="4" name="内容占位符 3">
+            <a:extLst>
+              <a:ext uri="{FF2B5EF4-FFF2-40B4-BE49-F238E27FC236}">
+                <a16:creationId xmlns:a16="http://schemas.microsoft.com/office/drawing/2014/main" id="{25605BE8-7CED-A702-22EB-A7D8C611C404}"/>
+              </a:ext>
+            </a:extLst>
+          </p:cNvPr>
+          <p:cNvSpPr>
+            <a:spLocks noGrp="1"/>
+          </p:cNvSpPr>
+          <p:nvPr>
+            <p:ph sz="half" idx="2"/>
+          </p:nvPr>
+        </p:nvSpPr>
+        <p:spPr>
+          <a:xfrm>
+            <a:off x="6096000" y="1375249"/>
+            <a:ext cx="5181600" cy="4351338"/>
+          </a:xfrm>
+        </p:spPr>
+        <p:txBody>
+          <a:bodyPr/>
+          <a:lstStyle/>
+          <a:p>
+            <a:r>
+              <a:rPr lang="zh-CN" altLang="en-US" dirty="0"/>
+              <a:t>看轻流</a:t>
+            </a:r>
+            <a:endParaRPr lang="en-US" altLang="zh-CN" dirty="0"/>
+          </a:p>
+          <a:p>
+            <a:r>
+              <a:rPr lang="zh-CN" altLang="en-US" dirty="0"/>
+              <a:t>看轻流</a:t>
+            </a:r>
+            <a:endParaRPr lang="en-US" altLang="zh-CN" dirty="0"/>
+          </a:p>
+          <a:p>
+            <a:r>
+              <a:rPr lang="zh-CN" altLang="en-US" dirty="0"/>
+              <a:t>看轻流</a:t>
+            </a:r>
+          </a:p>
+        </p:txBody>
+      </p:sp>
+      <p:pic>
+        <p:nvPicPr>
+          <p:cNvPr id="10" name="图片 9">
+            <a:extLst>
+              <a:ext uri="{FF2B5EF4-FFF2-40B4-BE49-F238E27FC236}">
+                <a16:creationId xmlns:a16="http://schemas.microsoft.com/office/drawing/2014/main" id="{CB03F7C1-A58A-A927-58F6-010EBF09BF55}"/>
+              </a:ext>
+            </a:extLst>
+          </p:cNvPr>
+          <p:cNvPicPr>
+            <a:picLocks noChangeAspect="1"/>
+          </p:cNvPicPr>
+          <p:nvPr/>
+        </p:nvPicPr>
+        <p:blipFill>
+          <a:blip r:embed="rId2"/>
+          <a:stretch>
+            <a:fillRect/>
+          </a:stretch>
+        </p:blipFill>
+        <p:spPr>
+          <a:xfrm>
+            <a:off x="0" y="3126270"/>
+            <a:ext cx="6583680" cy="3731730"/>
+          </a:xfrm>
+          <a:prstGeom prst="rect">
+            <a:avLst/>
+          </a:prstGeom>
+        </p:spPr>
+      </p:pic>
+      <p:pic>
+        <p:nvPicPr>
+          <p:cNvPr id="12" name="图片 11">
+            <a:extLst>
+              <a:ext uri="{FF2B5EF4-FFF2-40B4-BE49-F238E27FC236}">
+                <a16:creationId xmlns:a16="http://schemas.microsoft.com/office/drawing/2014/main" id="{53E6C745-3C9D-C18F-DB77-3BA9D30867B4}"/>
+              </a:ext>
+            </a:extLst>
+          </p:cNvPr>
+          <p:cNvPicPr>
+            <a:picLocks noChangeAspect="1"/>
+          </p:cNvPicPr>
+          <p:nvPr/>
+        </p:nvPicPr>
+        <p:blipFill>
+          <a:blip r:embed="rId3"/>
+          <a:stretch>
+            <a:fillRect/>
+          </a:stretch>
+        </p:blipFill>
+        <p:spPr>
+          <a:xfrm>
+            <a:off x="6581584" y="3776870"/>
+            <a:ext cx="5610416" cy="3081130"/>
+          </a:xfrm>
+          <a:prstGeom prst="rect">
+            <a:avLst/>
+          </a:prstGeom>
+        </p:spPr>
+      </p:pic>
+    </p:spTree>
+    <p:extLst>
+      <p:ext uri="{BB962C8B-B14F-4D97-AF65-F5344CB8AC3E}">
+        <p14:creationId xmlns:p14="http://schemas.microsoft.com/office/powerpoint/2010/main" val="353100262"/>
+      </p:ext>
+    </p:extLst>
+  </p:cSld>
+  <p:clrMapOvr>
+    <a:masterClrMapping/>
+  </p:clrMapOvr>
+</p:sld>
+</file>
+
+<file path=ppt/slides/slide7.xml><?xml version="1.0" encoding="utf-8"?>
+<p:sld xmlns:a="http://schemas.openxmlformats.org/drawingml/2006/main" xmlns:r="http://schemas.openxmlformats.org/officeDocument/2006/relationships" xmlns:p="http://schemas.openxmlformats.org/presentationml/2006/main">
+  <p:cSld>
+    <p:spTree>
+      <p:nvGrpSpPr>
+        <p:cNvPr id="1" name=""/>
+        <p:cNvGrpSpPr/>
+        <p:nvPr/>
+      </p:nvGrpSpPr>
+      <p:grpSpPr>
+        <a:xfrm>
+          <a:off x="0" y="0"/>
+          <a:ext cx="0" cy="0"/>
+          <a:chOff x="0" y="0"/>
+          <a:chExt cx="0" cy="0"/>
+        </a:xfrm>
+      </p:grpSpPr>
+      <p:sp>
+        <p:nvSpPr>
+          <p:cNvPr id="2" name="标题 1">
+            <a:extLst>
+              <a:ext uri="{FF2B5EF4-FFF2-40B4-BE49-F238E27FC236}">
+                <a16:creationId xmlns:a16="http://schemas.microsoft.com/office/drawing/2014/main" id="{E70F089B-E194-071F-8EA8-9FF3BB1F5B13}"/>
+              </a:ext>
+            </a:extLst>
+          </p:cNvPr>
+          <p:cNvSpPr>
+            <a:spLocks noGrp="1"/>
+          </p:cNvSpPr>
+          <p:nvPr>
+            <p:ph type="title"/>
+          </p:nvPr>
+        </p:nvSpPr>
+        <p:spPr/>
+        <p:txBody>
+          <a:bodyPr/>
+          <a:lstStyle/>
+          <a:p>
+            <a:r>
+              <a:rPr lang="zh-CN" altLang="en-US" dirty="0"/>
+              <a:t>裁判系统接线</a:t>
+            </a:r>
+          </a:p>
+        </p:txBody>
+      </p:sp>
+      <p:pic>
+        <p:nvPicPr>
+          <p:cNvPr id="8" name="图片 7">
+            <a:extLst>
+              <a:ext uri="{FF2B5EF4-FFF2-40B4-BE49-F238E27FC236}">
+                <a16:creationId xmlns:a16="http://schemas.microsoft.com/office/drawing/2014/main" id="{ADE28B5F-CBD4-830F-F15F-BB3D4BCB6922}"/>
+              </a:ext>
+            </a:extLst>
+          </p:cNvPr>
+          <p:cNvPicPr>
+            <a:picLocks noChangeAspect="1"/>
+          </p:cNvPicPr>
+          <p:nvPr/>
+        </p:nvPicPr>
+        <p:blipFill>
+          <a:blip r:embed="rId2"/>
+          <a:stretch>
+            <a:fillRect/>
+          </a:stretch>
+        </p:blipFill>
+        <p:spPr>
+          <a:xfrm>
+            <a:off x="1" y="2635741"/>
+            <a:ext cx="6510900" cy="4222259"/>
+          </a:xfrm>
+          <a:prstGeom prst="rect">
+            <a:avLst/>
+          </a:prstGeom>
+        </p:spPr>
+      </p:pic>
+      <p:pic>
+        <p:nvPicPr>
+          <p:cNvPr id="6" name="图片 5">
+            <a:extLst>
+              <a:ext uri="{FF2B5EF4-FFF2-40B4-BE49-F238E27FC236}">
+                <a16:creationId xmlns:a16="http://schemas.microsoft.com/office/drawing/2014/main" id="{597DAED7-2FB5-3F93-E243-D2AB85600908}"/>
+              </a:ext>
+            </a:extLst>
+          </p:cNvPr>
+          <p:cNvPicPr>
+            <a:picLocks noChangeAspect="1"/>
+          </p:cNvPicPr>
+          <p:nvPr/>
+        </p:nvPicPr>
+        <p:blipFill>
+          <a:blip r:embed="rId3"/>
+          <a:stretch>
+            <a:fillRect/>
+          </a:stretch>
+        </p:blipFill>
+        <p:spPr>
+          <a:xfrm>
+            <a:off x="6510901" y="0"/>
+            <a:ext cx="5681098" cy="6858000"/>
+          </a:xfrm>
+          <a:prstGeom prst="rect">
+            <a:avLst/>
+          </a:prstGeom>
+        </p:spPr>
+      </p:pic>
+    </p:spTree>
+    <p:extLst>
+      <p:ext uri="{BB962C8B-B14F-4D97-AF65-F5344CB8AC3E}">
+        <p14:creationId xmlns:p14="http://schemas.microsoft.com/office/powerpoint/2010/main" val="1689250814"/>
+      </p:ext>
+    </p:extLst>
+  </p:cSld>
+  <p:clrMapOvr>
+    <a:masterClrMapping/>
+  </p:clrMapOvr>
+</p:sld>
+</file>
+
+<file path=ppt/slides/slide8.xml><?xml version="1.0" encoding="utf-8"?>
+<p:sld xmlns:a="http://schemas.openxmlformats.org/drawingml/2006/main" xmlns:r="http://schemas.openxmlformats.org/officeDocument/2006/relationships" xmlns:p="http://schemas.openxmlformats.org/presentationml/2006/main">
+  <p:cSld>
+    <p:spTree>
+      <p:nvGrpSpPr>
+        <p:cNvPr id="1" name=""/>
+        <p:cNvGrpSpPr/>
+        <p:nvPr/>
+      </p:nvGrpSpPr>
+      <p:grpSpPr>
+        <a:xfrm>
+          <a:off x="0" y="0"/>
+          <a:ext cx="0" cy="0"/>
+          <a:chOff x="0" y="0"/>
+          <a:chExt cx="0" cy="0"/>
+        </a:xfrm>
+      </p:grpSpPr>
+      <p:sp>
+        <p:nvSpPr>
+          <p:cNvPr id="2" name="标题 1">
+            <a:extLst>
+              <a:ext uri="{FF2B5EF4-FFF2-40B4-BE49-F238E27FC236}">
+                <a16:creationId xmlns:a16="http://schemas.microsoft.com/office/drawing/2014/main" id="{C24C7C8E-BA93-8DA6-7F44-0DE045422661}"/>
+              </a:ext>
+            </a:extLst>
+          </p:cNvPr>
+          <p:cNvSpPr>
+            <a:spLocks noGrp="1"/>
+          </p:cNvSpPr>
+          <p:nvPr>
+            <p:ph type="title"/>
+          </p:nvPr>
+        </p:nvSpPr>
+        <p:spPr/>
+        <p:txBody>
+          <a:bodyPr/>
+          <a:lstStyle/>
+          <a:p>
+            <a:r>
+              <a:rPr lang="zh-CN" altLang="en-US" dirty="0"/>
+              <a:t>常见接口</a:t>
+            </a:r>
+          </a:p>
+        </p:txBody>
+      </p:sp>
+      <p:sp>
+        <p:nvSpPr>
+          <p:cNvPr id="4" name="内容占位符 3">
+            <a:extLst>
+              <a:ext uri="{FF2B5EF4-FFF2-40B4-BE49-F238E27FC236}">
+                <a16:creationId xmlns:a16="http://schemas.microsoft.com/office/drawing/2014/main" id="{C5F44374-BF35-4287-3117-D1D9B9F6DDC2}"/>
+              </a:ext>
+            </a:extLst>
+          </p:cNvPr>
+          <p:cNvSpPr>
+            <a:spLocks noGrp="1"/>
+          </p:cNvSpPr>
+          <p:nvPr>
+            <p:ph sz="half" idx="2"/>
+          </p:nvPr>
+        </p:nvSpPr>
+        <p:spPr>
+          <a:xfrm>
+            <a:off x="838200" y="1690688"/>
+            <a:ext cx="5181600" cy="4351338"/>
+          </a:xfrm>
+        </p:spPr>
+        <p:txBody>
+          <a:bodyPr/>
+          <a:lstStyle/>
+          <a:p>
+            <a:r>
+              <a:rPr lang="en-US" altLang="zh-CN" dirty="0"/>
+              <a:t>XT30/60</a:t>
+            </a:r>
+          </a:p>
+          <a:p>
+            <a:pPr marL="0" indent="0">
+              <a:buNone/>
+            </a:pPr>
+            <a:r>
+              <a:rPr lang="zh-CN" altLang="en-US" dirty="0"/>
+              <a:t>能过大电流，常用于功率线</a:t>
+            </a:r>
+            <a:endParaRPr lang="en-US" altLang="zh-CN" dirty="0"/>
+          </a:p>
+          <a:p>
+            <a:r>
+              <a:rPr lang="en-US" altLang="zh-CN" dirty="0"/>
+              <a:t>GH1.25</a:t>
+            </a:r>
+          </a:p>
+          <a:p>
+            <a:pPr marL="0" indent="0">
+              <a:buNone/>
+            </a:pPr>
+            <a:r>
+              <a:rPr lang="zh-CN" altLang="en-US" dirty="0"/>
+              <a:t>带锁扣，常用于信号线</a:t>
+            </a:r>
+            <a:endParaRPr lang="en-US" altLang="zh-CN" dirty="0"/>
+          </a:p>
+          <a:p>
+            <a:r>
+              <a:rPr lang="en-US" altLang="zh-CN" dirty="0"/>
+              <a:t>MX1.25</a:t>
+            </a:r>
+          </a:p>
+          <a:p>
+            <a:pPr marL="0" indent="0">
+              <a:buNone/>
+            </a:pPr>
+            <a:r>
+              <a:rPr lang="zh-CN" altLang="en-US" dirty="0"/>
+              <a:t>常用于烧录线</a:t>
+            </a:r>
+            <a:endParaRPr lang="en-US" altLang="zh-CN" dirty="0"/>
+          </a:p>
+        </p:txBody>
+      </p:sp>
+      <p:pic>
+        <p:nvPicPr>
+          <p:cNvPr id="8" name="内容占位符 7">
+            <a:extLst>
+              <a:ext uri="{FF2B5EF4-FFF2-40B4-BE49-F238E27FC236}">
+                <a16:creationId xmlns:a16="http://schemas.microsoft.com/office/drawing/2014/main" id="{D9EAE9ED-67F0-4E19-12CE-89257BB826BC}"/>
+              </a:ext>
+            </a:extLst>
+          </p:cNvPr>
+          <p:cNvPicPr>
+            <a:picLocks noGrp="1" noChangeAspect="1"/>
+          </p:cNvPicPr>
+          <p:nvPr>
+            <p:ph sz="half" idx="1"/>
+          </p:nvPr>
+        </p:nvPicPr>
+        <p:blipFill>
+          <a:blip r:embed="rId2">
+            <a:extLst>
+              <a:ext uri="{28A0092B-C50C-407E-A947-70E740481C1C}">
+                <a14:useLocalDpi xmlns:a14="http://schemas.microsoft.com/office/drawing/2010/main" val="0"/>
+              </a:ext>
+            </a:extLst>
+          </a:blip>
+          <a:stretch>
+            <a:fillRect/>
+          </a:stretch>
+        </p:blipFill>
+        <p:spPr>
+          <a:xfrm>
+            <a:off x="8764411" y="-1"/>
+            <a:ext cx="3427590" cy="3423311"/>
+          </a:xfrm>
+        </p:spPr>
+      </p:pic>
+      <p:sp>
+        <p:nvSpPr>
+          <p:cNvPr id="13" name="AutoShape 2" descr="Image result for GH1.25">
+            <a:hlinkClick r:id="rId3"/>
+            <a:extLst>
+              <a:ext uri="{FF2B5EF4-FFF2-40B4-BE49-F238E27FC236}">
+                <a16:creationId xmlns:a16="http://schemas.microsoft.com/office/drawing/2014/main" id="{9C70E040-D622-CFC2-6D1D-361B64295ACB}"/>
+              </a:ext>
+            </a:extLst>
+          </p:cNvPr>
+          <p:cNvSpPr>
+            <a:spLocks noChangeAspect="1" noChangeArrowheads="1"/>
+          </p:cNvSpPr>
+          <p:nvPr/>
+        </p:nvSpPr>
+        <p:spPr bwMode="auto">
+          <a:xfrm>
+            <a:off x="5210175" y="2543175"/>
+            <a:ext cx="1771650" cy="1771650"/>
+          </a:xfrm>
+          <a:prstGeom prst="rect">
+            <a:avLst/>
+          </a:prstGeom>
+          <a:noFill/>
+          <a:extLst>
+            <a:ext uri="{909E8E84-426E-40DD-AFC4-6F175D3DCCD1}">
+              <a14:hiddenFill xmlns:a14="http://schemas.microsoft.com/office/drawing/2010/main">
+                <a:solidFill>
+                  <a:srgbClr val="FFFFFF"/>
+                </a:solidFill>
+              </a14:hiddenFill>
+            </a:ext>
+          </a:extLst>
+        </p:spPr>
+        <p:txBody>
+          <a:bodyPr vert="horz" wrap="square" lIns="91440" tIns="45720" rIns="91440" bIns="45720" numCol="1" anchor="t" anchorCtr="0" compatLnSpc="1">
+            <a:prstTxWarp prst="textNoShape">
+              <a:avLst/>
+            </a:prstTxWarp>
+          </a:bodyPr>
+          <a:lstStyle/>
+          <a:p>
+            <a:endParaRPr lang="zh-CN" altLang="en-US"/>
+          </a:p>
+        </p:txBody>
+      </p:sp>
+      <p:pic>
+        <p:nvPicPr>
+          <p:cNvPr id="15" name="图片 14">
+            <a:extLst>
+              <a:ext uri="{FF2B5EF4-FFF2-40B4-BE49-F238E27FC236}">
+                <a16:creationId xmlns:a16="http://schemas.microsoft.com/office/drawing/2014/main" id="{B93F5982-812A-B0CD-9856-F77BDA165C18}"/>
+              </a:ext>
+            </a:extLst>
+          </p:cNvPr>
+          <p:cNvPicPr>
+            <a:picLocks noChangeAspect="1"/>
+          </p:cNvPicPr>
+          <p:nvPr/>
+        </p:nvPicPr>
+        <p:blipFill>
+          <a:blip r:embed="rId4">
+            <a:extLst>
+              <a:ext uri="{28A0092B-C50C-407E-A947-70E740481C1C}">
+                <a14:useLocalDpi xmlns:a14="http://schemas.microsoft.com/office/drawing/2010/main" val="0"/>
+              </a:ext>
+            </a:extLst>
+          </a:blip>
+          <a:stretch>
+            <a:fillRect/>
+          </a:stretch>
+        </p:blipFill>
+        <p:spPr>
+          <a:xfrm>
+            <a:off x="8764411" y="3423310"/>
+            <a:ext cx="3437613" cy="3437613"/>
+          </a:xfrm>
+          <a:prstGeom prst="rect">
+            <a:avLst/>
+          </a:prstGeom>
+        </p:spPr>
+      </p:pic>
+    </p:spTree>
+    <p:extLst>
+      <p:ext uri="{BB962C8B-B14F-4D97-AF65-F5344CB8AC3E}">
+        <p14:creationId xmlns:p14="http://schemas.microsoft.com/office/powerpoint/2010/main" val="2861687271"/>
+      </p:ext>
+    </p:extLst>
+  </p:cSld>
+  <p:clrMapOvr>
+    <a:masterClrMapping/>
+  </p:clrMapOvr>
+</p:sld>
+</file>
+
+<file path=ppt/slides/slide9.xml><?xml version="1.0" encoding="utf-8"?>
+<p:sld xmlns:a="http://schemas.openxmlformats.org/drawingml/2006/main" xmlns:r="http://schemas.openxmlformats.org/officeDocument/2006/relationships" xmlns:p="http://schemas.openxmlformats.org/presentationml/2006/main">
+  <p:cSld>
+    <p:spTree>
+      <p:nvGrpSpPr>
+        <p:cNvPr id="1" name=""/>
+        <p:cNvGrpSpPr/>
+        <p:nvPr/>
+      </p:nvGrpSpPr>
+      <p:grpSpPr>
+        <a:xfrm>
+          <a:off x="0" y="0"/>
+          <a:ext cx="0" cy="0"/>
+          <a:chOff x="0" y="0"/>
+          <a:chExt cx="0" cy="0"/>
+        </a:xfrm>
+      </p:grpSpPr>
+      <p:sp>
+        <p:nvSpPr>
+          <p:cNvPr id="2" name="标题 1">
+            <a:extLst>
+              <a:ext uri="{FF2B5EF4-FFF2-40B4-BE49-F238E27FC236}">
+                <a16:creationId xmlns:a16="http://schemas.microsoft.com/office/drawing/2014/main" id="{C24C7C8E-BA93-8DA6-7F44-0DE045422661}"/>
+              </a:ext>
+            </a:extLst>
+          </p:cNvPr>
+          <p:cNvSpPr>
+            <a:spLocks noGrp="1"/>
+          </p:cNvSpPr>
+          <p:nvPr>
+            <p:ph type="title"/>
+          </p:nvPr>
+        </p:nvSpPr>
+        <p:spPr/>
+        <p:txBody>
+          <a:bodyPr/>
+          <a:lstStyle/>
+          <a:p>
+            <a:r>
+              <a:rPr lang="zh-CN" altLang="en-US" dirty="0"/>
+              <a:t>常见线材</a:t>
+            </a:r>
+          </a:p>
+        </p:txBody>
+      </p:sp>
+      <p:pic>
+        <p:nvPicPr>
+          <p:cNvPr id="6" name="内容占位符 5">
+            <a:extLst>
+              <a:ext uri="{FF2B5EF4-FFF2-40B4-BE49-F238E27FC236}">
+                <a16:creationId xmlns:a16="http://schemas.microsoft.com/office/drawing/2014/main" id="{3F11D634-38BE-8516-AFF0-43FE5F48ED38}"/>
+              </a:ext>
+            </a:extLst>
+          </p:cNvPr>
+          <p:cNvPicPr>
+            <a:picLocks noGrp="1" noChangeAspect="1"/>
+          </p:cNvPicPr>
+          <p:nvPr>
+            <p:ph sz="half" idx="1"/>
+          </p:nvPr>
+        </p:nvPicPr>
+        <p:blipFill>
+          <a:blip r:embed="rId2">
+            <a:extLst>
+              <a:ext uri="{28A0092B-C50C-407E-A947-70E740481C1C}">
+                <a14:useLocalDpi xmlns:a14="http://schemas.microsoft.com/office/drawing/2010/main" val="0"/>
+              </a:ext>
+            </a:extLst>
+          </a:blip>
+          <a:stretch>
+            <a:fillRect/>
+          </a:stretch>
+        </p:blipFill>
+        <p:spPr>
+          <a:xfrm>
+            <a:off x="6096000" y="2661334"/>
+            <a:ext cx="5181600" cy="1205023"/>
+          </a:xfrm>
+        </p:spPr>
+      </p:pic>
+      <p:sp>
+        <p:nvSpPr>
+          <p:cNvPr id="4" name="内容占位符 3">
+            <a:extLst>
+              <a:ext uri="{FF2B5EF4-FFF2-40B4-BE49-F238E27FC236}">
+                <a16:creationId xmlns:a16="http://schemas.microsoft.com/office/drawing/2014/main" id="{C5F44374-BF35-4287-3117-D1D9B9F6DDC2}"/>
+              </a:ext>
+            </a:extLst>
+          </p:cNvPr>
+          <p:cNvSpPr>
+            <a:spLocks noGrp="1"/>
+          </p:cNvSpPr>
+          <p:nvPr>
+            <p:ph sz="half" idx="2"/>
+          </p:nvPr>
+        </p:nvSpPr>
+        <p:spPr>
+          <a:xfrm>
+            <a:off x="838200" y="1690688"/>
+            <a:ext cx="5181600" cy="4351338"/>
+          </a:xfrm>
+        </p:spPr>
+        <p:txBody>
+          <a:bodyPr/>
+          <a:lstStyle/>
+          <a:p>
+            <a:r>
+              <a:rPr lang="zh-CN" altLang="en-US" dirty="0"/>
+              <a:t>硅胶线：软但易破易脱落</a:t>
+            </a:r>
+            <a:endParaRPr lang="en-US" altLang="zh-CN" dirty="0"/>
+          </a:p>
+          <a:p>
+            <a:r>
+              <a:rPr lang="zh-CN" altLang="en-US" dirty="0"/>
+              <a:t>铁氟龙线：结实但硬，不易弯折</a:t>
+            </a:r>
+            <a:endParaRPr lang="en-US" altLang="zh-CN" dirty="0"/>
+          </a:p>
+          <a:p>
+            <a:r>
+              <a:rPr lang="zh-CN" altLang="en-US" dirty="0"/>
+              <a:t>屏蔽双绞线缆：粗而重，不易弯折，一般仅用于高速差分信号</a:t>
+            </a:r>
+            <a:endParaRPr lang="en-US" altLang="zh-CN" dirty="0"/>
+          </a:p>
+          <a:p>
+            <a:endParaRPr lang="zh-CN" altLang="en-US" dirty="0"/>
+          </a:p>
+        </p:txBody>
+      </p:sp>
+    </p:spTree>
+    <p:extLst>
+      <p:ext uri="{BB962C8B-B14F-4D97-AF65-F5344CB8AC3E}">
+        <p14:creationId xmlns:p14="http://schemas.microsoft.com/office/powerpoint/2010/main" val="2703905542"/>
+      </p:ext>
+    </p:extLst>
+  </p:cSld>
+  <p:clrMapOvr>
+    <a:masterClrMapping/>
+  </p:clrMapOvr>
+  <p:timing>
+    <p:tnLst>
+      <p:par>
+        <p:cTn id="1" dur="indefinite" restart="never" nodeType="tmRoot">
+          <p:childTnLst>
+            <p:seq concurrent="1" nextAc="seek">
+              <p:cTn id="2" dur="indefinite" nodeType="mainSeq">
+                <p:childTnLst>
+                  <p:par>
+                    <p:cTn id="3" fill="hold">
+                      <p:stCondLst>
+                        <p:cond delay="indefinite"/>
+                      </p:stCondLst>
+                      <p:childTnLst>
+                        <p:par>
+                          <p:cTn id="4" fill="hold">
+                            <p:stCondLst>
+                              <p:cond delay="0"/>
+                            </p:stCondLst>
+                            <p:childTnLst>
+                              <p:par>
+                                <p:cTn id="5" presetID="1" presetClass="entr" presetSubtype="0" fill="hold" nodeType="clickEffect">
+                                  <p:stCondLst>
+                                    <p:cond delay="0"/>
+                                  </p:stCondLst>
+                                  <p:childTnLst>
+                                    <p:set>
+                                      <p:cBhvr>
+                                        <p:cTn id="6" dur="1" fill="hold">
+                                          <p:stCondLst>
+                                            <p:cond delay="0"/>
+                                          </p:stCondLst>
+                                        </p:cTn>
+                                        <p:tgtEl>
+                                          <p:spTgt spid="6"/>
+                                        </p:tgtEl>
+                                        <p:attrNameLst>
+                                          <p:attrName>style.visibility</p:attrName>
+                                        </p:attrNameLst>
+                                      </p:cBhvr>
+                                      <p:to>
+                                        <p:strVal val="visible"/>
+                                      </p:to>
+                                    </p:set>
+                                  </p:childTnLst>
+                                </p:cTn>
+                              </p:par>
+                            </p:childTnLst>
+                          </p:cTn>
+                        </p:par>
+                      </p:childTnLst>
+                    </p:cTn>
+                  </p:par>
+                </p:childTnLst>
+              </p:cTn>
+              <p:prevCondLst>
+                <p:cond evt="onPrev" delay="0">
+                  <p:tgtEl>
+                    <p:sldTgt/>
+                  </p:tgtEl>
+                </p:cond>
+              </p:prevCondLst>
+              <p:nextCondLst>
+                <p:cond evt="onNext" delay="0">
+                  <p:tgtEl>
+                    <p:sldTgt/>
+                  </p:tgtEl>
+                </p:cond>
+              </p:nextCondLst>
+            </p:seq>
+          </p:childTnLst>
+        </p:cTn>
+      </p:par>
+    </p:tnLst>
+  </p:timing>
 </p:sld>
 </file>
 
